--- a/13.Free-ClaudeCode-With-MCPServer-On-Windows/Terraform_Fundamentals_v2.pptx
+++ b/13.Free-ClaudeCode-With-MCPServer-On-Windows/Terraform_Fundamentals_v2.pptx
@@ -5,7 +5,7 @@
     <p:sldMasterId id="2147483648" r:id="rId1"/>
   </p:sldMasterIdLst>
   <p:notesMasterIdLst>
-    <p:notesMasterId r:id="rId20"/>
+    <p:notesMasterId r:id="rId23"/>
   </p:notesMasterIdLst>
   <p:sldIdLst>
     <p:sldId id="256" r:id="rId2"/>
@@ -26,6 +26,9 @@
     <p:sldId id="271" r:id="rId17"/>
     <p:sldId id="273" r:id="rId18"/>
     <p:sldId id="272" r:id="rId19"/>
+    <p:sldId id="274" r:id="rId20"/>
+    <p:sldId id="276" r:id="rId21"/>
+    <p:sldId id="275" r:id="rId22"/>
   </p:sldIdLst>
   <p:sldSz cx="9144000" cy="5143500" type="screen16x9"/>
   <p:notesSz cx="5143500" cy="9144000"/>
@@ -129,15 +132,70 @@
 </p:presentation>
 </file>
 
+<file path=ppt/revisionInfo.xml><?xml version="1.0" encoding="utf-8"?>
+<p1510:revInfo xmlns:a="http://schemas.openxmlformats.org/drawingml/2006/main" xmlns:r="http://schemas.openxmlformats.org/officeDocument/2006/relationships" xmlns:p1510="http://schemas.microsoft.com/office/powerpoint/2015/10/main">
+  <p1510:revLst>
+    <p1510:client id="{7E8DF6FB-9ACA-470E-BAFE-8F9863E5953B}" v="39" dt="2026-05-28T02:38:26.875"/>
+  </p1510:revLst>
+</p1510:revInfo>
+</file>
+
 <file path=ppt/changesInfos/changesInfo1.xml><?xml version="1.0" encoding="utf-8"?>
 <pc:chgInfo xmlns:a="http://schemas.openxmlformats.org/drawingml/2006/main" xmlns:r="http://schemas.openxmlformats.org/officeDocument/2006/relationships" xmlns:ac="http://schemas.microsoft.com/office/drawing/2013/main/command" xmlns:pc="http://schemas.microsoft.com/office/powerpoint/2013/main/command">
   <pc:docChgLst>
     <pc:chgData name="Balraj Singh" userId="ebb3560a-49c8-4fe6-88be-cab19d206209" providerId="ADAL" clId="{61DE5220-E41B-45DA-B74E-167A1F9548F3}"/>
-    <pc:docChg chg="modSld sldOrd">
-      <pc:chgData name="Balraj Singh" userId="ebb3560a-49c8-4fe6-88be-cab19d206209" providerId="ADAL" clId="{61DE5220-E41B-45DA-B74E-167A1F9548F3}" dt="2026-05-26T23:32:25.599" v="7" actId="1076"/>
+    <pc:docChg chg="undo custSel addSld delSld modSld sldOrd">
+      <pc:chgData name="Balraj Singh" userId="ebb3560a-49c8-4fe6-88be-cab19d206209" providerId="ADAL" clId="{61DE5220-E41B-45DA-B74E-167A1F9548F3}" dt="2026-05-28T02:40:58.399" v="681" actId="6549"/>
       <pc:docMkLst>
         <pc:docMk/>
       </pc:docMkLst>
+      <pc:sldChg chg="addSp delSp modSp mod">
+        <pc:chgData name="Balraj Singh" userId="ebb3560a-49c8-4fe6-88be-cab19d206209" providerId="ADAL" clId="{61DE5220-E41B-45DA-B74E-167A1F9548F3}" dt="2026-05-27T23:47:35.665" v="344" actId="12385"/>
+        <pc:sldMkLst>
+          <pc:docMk/>
+          <pc:sldMk cId="0" sldId="272"/>
+        </pc:sldMkLst>
+        <pc:spChg chg="mod">
+          <ac:chgData name="Balraj Singh" userId="ebb3560a-49c8-4fe6-88be-cab19d206209" providerId="ADAL" clId="{61DE5220-E41B-45DA-B74E-167A1F9548F3}" dt="2026-05-27T23:36:45.998" v="65" actId="1076"/>
+          <ac:spMkLst>
+            <pc:docMk/>
+            <pc:sldMk cId="0" sldId="272"/>
+            <ac:spMk id="3" creationId="{00000000-0000-0000-0000-000000000000}"/>
+          </ac:spMkLst>
+        </pc:spChg>
+        <pc:spChg chg="mod">
+          <ac:chgData name="Balraj Singh" userId="ebb3560a-49c8-4fe6-88be-cab19d206209" providerId="ADAL" clId="{61DE5220-E41B-45DA-B74E-167A1F9548F3}" dt="2026-05-27T23:36:49.198" v="66" actId="1076"/>
+          <ac:spMkLst>
+            <pc:docMk/>
+            <pc:sldMk cId="0" sldId="272"/>
+            <ac:spMk id="4" creationId="{00000000-0000-0000-0000-000000000000}"/>
+          </ac:spMkLst>
+        </pc:spChg>
+        <pc:spChg chg="mod">
+          <ac:chgData name="Balraj Singh" userId="ebb3560a-49c8-4fe6-88be-cab19d206209" providerId="ADAL" clId="{61DE5220-E41B-45DA-B74E-167A1F9548F3}" dt="2026-05-27T23:36:55.371" v="104" actId="1036"/>
+          <ac:spMkLst>
+            <pc:docMk/>
+            <pc:sldMk cId="0" sldId="272"/>
+            <ac:spMk id="5" creationId="{00000000-0000-0000-0000-000000000000}"/>
+          </ac:spMkLst>
+        </pc:spChg>
+        <pc:spChg chg="del mod">
+          <ac:chgData name="Balraj Singh" userId="ebb3560a-49c8-4fe6-88be-cab19d206209" providerId="ADAL" clId="{61DE5220-E41B-45DA-B74E-167A1F9548F3}" dt="2026-05-27T23:36:05.544" v="59" actId="478"/>
+          <ac:spMkLst>
+            <pc:docMk/>
+            <pc:sldMk cId="0" sldId="272"/>
+            <ac:spMk id="6" creationId="{00000000-0000-0000-0000-000000000000}"/>
+          </ac:spMkLst>
+        </pc:spChg>
+        <pc:graphicFrameChg chg="add mod modGraphic">
+          <ac:chgData name="Balraj Singh" userId="ebb3560a-49c8-4fe6-88be-cab19d206209" providerId="ADAL" clId="{61DE5220-E41B-45DA-B74E-167A1F9548F3}" dt="2026-05-27T23:47:35.665" v="344" actId="12385"/>
+          <ac:graphicFrameMkLst>
+            <pc:docMk/>
+            <pc:sldMk cId="0" sldId="272"/>
+            <ac:graphicFrameMk id="8" creationId="{D365D20E-B05A-A977-8DBA-A9600EC5D093}"/>
+          </ac:graphicFrameMkLst>
+        </pc:graphicFrameChg>
+      </pc:sldChg>
       <pc:sldChg chg="modSp mod ord">
         <pc:chgData name="Balraj Singh" userId="ebb3560a-49c8-4fe6-88be-cab19d206209" providerId="ADAL" clId="{61DE5220-E41B-45DA-B74E-167A1F9548F3}" dt="2026-05-26T23:32:25.599" v="7" actId="1076"/>
         <pc:sldMkLst>
@@ -174,6 +232,146 @@
             <pc:docMk/>
             <pc:sldMk cId="0" sldId="273"/>
             <ac:spMk id="32" creationId="{00000000-0000-0000-0000-000000000000}"/>
+          </ac:spMkLst>
+        </pc:spChg>
+      </pc:sldChg>
+      <pc:sldChg chg="modSp add mod">
+        <pc:chgData name="Balraj Singh" userId="ebb3560a-49c8-4fe6-88be-cab19d206209" providerId="ADAL" clId="{61DE5220-E41B-45DA-B74E-167A1F9548F3}" dt="2026-05-28T02:40:58.399" v="681" actId="6549"/>
+        <pc:sldMkLst>
+          <pc:docMk/>
+          <pc:sldMk cId="3715516981" sldId="274"/>
+        </pc:sldMkLst>
+        <pc:spChg chg="mod">
+          <ac:chgData name="Balraj Singh" userId="ebb3560a-49c8-4fe6-88be-cab19d206209" providerId="ADAL" clId="{61DE5220-E41B-45DA-B74E-167A1F9548F3}" dt="2026-05-27T23:41:38.656" v="241" actId="14100"/>
+          <ac:spMkLst>
+            <pc:docMk/>
+            <pc:sldMk cId="3715516981" sldId="274"/>
+            <ac:spMk id="3" creationId="{6B1C514B-B70A-CD7E-3233-DBE09070D6EF}"/>
+          </ac:spMkLst>
+        </pc:spChg>
+        <pc:spChg chg="mod">
+          <ac:chgData name="Balraj Singh" userId="ebb3560a-49c8-4fe6-88be-cab19d206209" providerId="ADAL" clId="{61DE5220-E41B-45DA-B74E-167A1F9548F3}" dt="2026-05-27T23:41:43.504" v="242" actId="1076"/>
+          <ac:spMkLst>
+            <pc:docMk/>
+            <pc:sldMk cId="3715516981" sldId="274"/>
+            <ac:spMk id="4" creationId="{A1392743-2E8C-B4F5-5B66-D39449455816}"/>
+          </ac:spMkLst>
+        </pc:spChg>
+        <pc:spChg chg="mod">
+          <ac:chgData name="Balraj Singh" userId="ebb3560a-49c8-4fe6-88be-cab19d206209" providerId="ADAL" clId="{61DE5220-E41B-45DA-B74E-167A1F9548F3}" dt="2026-05-27T23:41:51.110" v="259" actId="1036"/>
+          <ac:spMkLst>
+            <pc:docMk/>
+            <pc:sldMk cId="3715516981" sldId="274"/>
+            <ac:spMk id="5" creationId="{B64729F2-249F-2C13-3D23-5B6CFB19CEC8}"/>
+          </ac:spMkLst>
+        </pc:spChg>
+        <pc:spChg chg="mod">
+          <ac:chgData name="Balraj Singh" userId="ebb3560a-49c8-4fe6-88be-cab19d206209" providerId="ADAL" clId="{61DE5220-E41B-45DA-B74E-167A1F9548F3}" dt="2026-05-28T02:40:58.399" v="681" actId="6549"/>
+          <ac:spMkLst>
+            <pc:docMk/>
+            <pc:sldMk cId="3715516981" sldId="274"/>
+            <ac:spMk id="6" creationId="{FA6FF5E9-DB59-43FD-24CC-C3C83052CD3F}"/>
+          </ac:spMkLst>
+        </pc:spChg>
+      </pc:sldChg>
+      <pc:sldChg chg="delSp modSp add mod">
+        <pc:chgData name="Balraj Singh" userId="ebb3560a-49c8-4fe6-88be-cab19d206209" providerId="ADAL" clId="{61DE5220-E41B-45DA-B74E-167A1F9548F3}" dt="2026-05-27T23:51:28.505" v="365" actId="1076"/>
+        <pc:sldMkLst>
+          <pc:docMk/>
+          <pc:sldMk cId="2346578347" sldId="275"/>
+        </pc:sldMkLst>
+        <pc:spChg chg="mod">
+          <ac:chgData name="Balraj Singh" userId="ebb3560a-49c8-4fe6-88be-cab19d206209" providerId="ADAL" clId="{61DE5220-E41B-45DA-B74E-167A1F9548F3}" dt="2026-05-27T23:51:21.794" v="364" actId="1036"/>
+          <ac:spMkLst>
+            <pc:docMk/>
+            <pc:sldMk cId="2346578347" sldId="275"/>
+            <ac:spMk id="2" creationId="{92A86F4C-3A8A-4833-342E-02AE57BFD583}"/>
+          </ac:spMkLst>
+        </pc:spChg>
+        <pc:spChg chg="mod">
+          <ac:chgData name="Balraj Singh" userId="ebb3560a-49c8-4fe6-88be-cab19d206209" providerId="ADAL" clId="{61DE5220-E41B-45DA-B74E-167A1F9548F3}" dt="2026-05-27T23:51:28.505" v="365" actId="1076"/>
+          <ac:spMkLst>
+            <pc:docMk/>
+            <pc:sldMk cId="2346578347" sldId="275"/>
+            <ac:spMk id="3" creationId="{44FD1024-C679-FDDD-0F62-885E0E597B25}"/>
+          </ac:spMkLst>
+        </pc:spChg>
+        <pc:spChg chg="mod">
+          <ac:chgData name="Balraj Singh" userId="ebb3560a-49c8-4fe6-88be-cab19d206209" providerId="ADAL" clId="{61DE5220-E41B-45DA-B74E-167A1F9548F3}" dt="2026-05-27T23:51:21.794" v="364" actId="1036"/>
+          <ac:spMkLst>
+            <pc:docMk/>
+            <pc:sldMk cId="2346578347" sldId="275"/>
+            <ac:spMk id="4" creationId="{8AF1D212-0AD9-0C89-D8EA-CBDDA74FED26}"/>
+          </ac:spMkLst>
+        </pc:spChg>
+        <pc:spChg chg="mod">
+          <ac:chgData name="Balraj Singh" userId="ebb3560a-49c8-4fe6-88be-cab19d206209" providerId="ADAL" clId="{61DE5220-E41B-45DA-B74E-167A1F9548F3}" dt="2026-05-27T23:51:21.794" v="364" actId="1036"/>
+          <ac:spMkLst>
+            <pc:docMk/>
+            <pc:sldMk cId="2346578347" sldId="275"/>
+            <ac:spMk id="5" creationId="{61B2BAEC-9A1A-A65C-471F-731E1E74CCF9}"/>
+          </ac:spMkLst>
+        </pc:spChg>
+        <pc:spChg chg="del">
+          <ac:chgData name="Balraj Singh" userId="ebb3560a-49c8-4fe6-88be-cab19d206209" providerId="ADAL" clId="{61DE5220-E41B-45DA-B74E-167A1F9548F3}" dt="2026-05-27T23:49:48.487" v="349" actId="478"/>
+          <ac:spMkLst>
+            <pc:docMk/>
+            <pc:sldMk cId="2346578347" sldId="275"/>
+            <ac:spMk id="6" creationId="{EBAB9BAA-2273-802A-5A6F-ABCA1EEC2DF5}"/>
+          </ac:spMkLst>
+        </pc:spChg>
+        <pc:spChg chg="mod">
+          <ac:chgData name="Balraj Singh" userId="ebb3560a-49c8-4fe6-88be-cab19d206209" providerId="ADAL" clId="{61DE5220-E41B-45DA-B74E-167A1F9548F3}" dt="2026-05-27T23:51:21.794" v="364" actId="1036"/>
+          <ac:spMkLst>
+            <pc:docMk/>
+            <pc:sldMk cId="2346578347" sldId="275"/>
+            <ac:spMk id="7" creationId="{95B64770-26A0-C79C-37BE-07725003F915}"/>
+          </ac:spMkLst>
+        </pc:spChg>
+      </pc:sldChg>
+      <pc:sldChg chg="add del setBg">
+        <pc:chgData name="Balraj Singh" userId="ebb3560a-49c8-4fe6-88be-cab19d206209" providerId="ADAL" clId="{61DE5220-E41B-45DA-B74E-167A1F9548F3}" dt="2026-05-27T23:49:13.304" v="347" actId="2696"/>
+        <pc:sldMkLst>
+          <pc:docMk/>
+          <pc:sldMk cId="0" sldId="276"/>
+        </pc:sldMkLst>
+      </pc:sldChg>
+      <pc:sldChg chg="addSp delSp modSp add mod">
+        <pc:chgData name="Balraj Singh" userId="ebb3560a-49c8-4fe6-88be-cab19d206209" providerId="ADAL" clId="{61DE5220-E41B-45DA-B74E-167A1F9548F3}" dt="2026-05-28T02:40:37.095" v="671" actId="207"/>
+        <pc:sldMkLst>
+          <pc:docMk/>
+          <pc:sldMk cId="2899190600" sldId="276"/>
+        </pc:sldMkLst>
+        <pc:spChg chg="mod">
+          <ac:chgData name="Balraj Singh" userId="ebb3560a-49c8-4fe6-88be-cab19d206209" providerId="ADAL" clId="{61DE5220-E41B-45DA-B74E-167A1F9548F3}" dt="2026-05-28T02:28:22.488" v="383" actId="20577"/>
+          <ac:spMkLst>
+            <pc:docMk/>
+            <pc:sldMk cId="2899190600" sldId="276"/>
+            <ac:spMk id="3" creationId="{C6CC1475-FB2C-3ECB-A92B-F6303B121C20}"/>
+          </ac:spMkLst>
+        </pc:spChg>
+        <pc:spChg chg="add del mod">
+          <ac:chgData name="Balraj Singh" userId="ebb3560a-49c8-4fe6-88be-cab19d206209" providerId="ADAL" clId="{61DE5220-E41B-45DA-B74E-167A1F9548F3}" dt="2026-05-28T02:40:07.641" v="662" actId="1076"/>
+          <ac:spMkLst>
+            <pc:docMk/>
+            <pc:sldMk cId="2899190600" sldId="276"/>
+            <ac:spMk id="4" creationId="{C7D33C2F-F4CC-2CD6-D268-B6A449C7A0E8}"/>
+          </ac:spMkLst>
+        </pc:spChg>
+        <pc:spChg chg="add del">
+          <ac:chgData name="Balraj Singh" userId="ebb3560a-49c8-4fe6-88be-cab19d206209" providerId="ADAL" clId="{61DE5220-E41B-45DA-B74E-167A1F9548F3}" dt="2026-05-28T02:28:48.802" v="389" actId="478"/>
+          <ac:spMkLst>
+            <pc:docMk/>
+            <pc:sldMk cId="2899190600" sldId="276"/>
+            <ac:spMk id="5" creationId="{0095C597-F1D8-A6FF-215D-1347CD20F94E}"/>
+          </ac:spMkLst>
+        </pc:spChg>
+        <pc:spChg chg="mod">
+          <ac:chgData name="Balraj Singh" userId="ebb3560a-49c8-4fe6-88be-cab19d206209" providerId="ADAL" clId="{61DE5220-E41B-45DA-B74E-167A1F9548F3}" dt="2026-05-28T02:40:37.095" v="671" actId="207"/>
+          <ac:spMkLst>
+            <pc:docMk/>
+            <pc:sldMk cId="2899190600" sldId="276"/>
+            <ac:spMk id="6" creationId="{1418FF77-03B9-CD0D-6DD9-C2481BC1323F}"/>
           </ac:spMkLst>
         </pc:spChg>
       </pc:sldChg>
@@ -687,6 +885,63 @@
           <a:bodyPr/>
           <a:lstStyle/>
           <a:p>
+            <a:r>
+              <a:rPr lang="en-AU" b="1" dirty="0"/>
+              <a:t>Primary Difference (The Core Idea)</a:t>
+            </a:r>
+          </a:p>
+          <a:p>
+            <a:r>
+              <a:rPr lang="en-AU" b="1" dirty="0"/>
+              <a:t>GitHub Copilot</a:t>
+            </a:r>
+            <a:r>
+              <a:rPr lang="en-AU" dirty="0"/>
+              <a:t> is a suggestion engine that predicts the next line of code based on what you're typing and presents it for you to accept or reject, while </a:t>
+            </a:r>
+            <a:r>
+              <a:rPr lang="en-AU" b="1" dirty="0"/>
+              <a:t>Claude Code</a:t>
+            </a:r>
+            <a:r>
+              <a:rPr lang="en-AU" dirty="0"/>
+              <a:t> is an agentic system that reads your entire codebase, plans what needs to be done, executes changes across multiple files, and iterates on its own. </a:t>
+            </a:r>
+            <a:r>
+              <a:rPr lang="en-AU" dirty="0">
+                <a:hlinkClick r:id="rId3"/>
+              </a:rPr>
+              <a:t>Mind-core</a:t>
+            </a:r>
+            <a:endParaRPr lang="en-AU" dirty="0"/>
+          </a:p>
+          <a:p>
+            <a:r>
+              <a:rPr lang="en-AU" dirty="0"/>
+              <a:t>Think of it this way:</a:t>
+            </a:r>
+          </a:p>
+          <a:p>
+            <a:r>
+              <a:rPr lang="en-AU" b="1" dirty="0"/>
+              <a:t>Copilot</a:t>
+            </a:r>
+            <a:r>
+              <a:rPr lang="en-AU" dirty="0"/>
+              <a:t> = A helpful autocomplete that speeds up your typing (line-by-line help)</a:t>
+            </a:r>
+          </a:p>
+          <a:p>
+            <a:r>
+              <a:rPr lang="en-AU" b="1" dirty="0"/>
+              <a:t>Claude Code</a:t>
+            </a:r>
+            <a:r>
+              <a:rPr lang="en-AU" dirty="0"/>
+              <a:t> = A junior engineer that understands your whole project and can tackle bigger tasks (full project tasks)</a:t>
+            </a:r>
+          </a:p>
+          <a:p>
             <a:endParaRPr lang="en-US" dirty="0"/>
           </a:p>
         </p:txBody>
@@ -1147,6 +1402,114 @@
 </p:notes>
 </file>
 
+<file path=ppt/notesSlides/notesSlide19.xml><?xml version="1.0" encoding="utf-8"?>
+<p:notes xmlns:a="http://schemas.openxmlformats.org/drawingml/2006/main" xmlns:r="http://schemas.openxmlformats.org/officeDocument/2006/relationships" xmlns:p="http://schemas.openxmlformats.org/presentationml/2006/main">
+  <p:cSld>
+    <p:spTree>
+      <p:nvGrpSpPr>
+        <p:cNvPr id="1" name="">
+          <a:extLst>
+            <a:ext uri="{FF2B5EF4-FFF2-40B4-BE49-F238E27FC236}">
+              <a16:creationId xmlns:a16="http://schemas.microsoft.com/office/drawing/2014/main" id="{9B62F391-588B-B222-56A0-6B2018DB4593}"/>
+            </a:ext>
+          </a:extLst>
+        </p:cNvPr>
+        <p:cNvGrpSpPr/>
+        <p:nvPr/>
+      </p:nvGrpSpPr>
+      <p:grpSpPr>
+        <a:xfrm>
+          <a:off x="0" y="0"/>
+          <a:ext cx="0" cy="0"/>
+          <a:chOff x="0" y="0"/>
+          <a:chExt cx="0" cy="0"/>
+        </a:xfrm>
+      </p:grpSpPr>
+      <p:sp>
+        <p:nvSpPr>
+          <p:cNvPr id="2" name="Slide Image Placeholder 1">
+            <a:extLst>
+              <a:ext uri="{FF2B5EF4-FFF2-40B4-BE49-F238E27FC236}">
+                <a16:creationId xmlns:a16="http://schemas.microsoft.com/office/drawing/2014/main" id="{DC52FE84-0002-8479-D44A-5856FDE9B24F}"/>
+              </a:ext>
+            </a:extLst>
+          </p:cNvPr>
+          <p:cNvSpPr>
+            <a:spLocks noGrp="1" noRot="1" noChangeAspect="1"/>
+          </p:cNvSpPr>
+          <p:nvPr>
+            <p:ph type="sldImg"/>
+          </p:nvPr>
+        </p:nvSpPr>
+        <p:spPr/>
+      </p:sp>
+      <p:sp>
+        <p:nvSpPr>
+          <p:cNvPr id="3" name="Notes Placeholder 2">
+            <a:extLst>
+              <a:ext uri="{FF2B5EF4-FFF2-40B4-BE49-F238E27FC236}">
+                <a16:creationId xmlns:a16="http://schemas.microsoft.com/office/drawing/2014/main" id="{B7457F0C-C9E7-F550-272E-DFD0A25A1931}"/>
+              </a:ext>
+            </a:extLst>
+          </p:cNvPr>
+          <p:cNvSpPr>
+            <a:spLocks noGrp="1"/>
+          </p:cNvSpPr>
+          <p:nvPr>
+            <p:ph type="body" idx="1"/>
+          </p:nvPr>
+        </p:nvSpPr>
+        <p:spPr/>
+        <p:txBody>
+          <a:bodyPr/>
+          <a:lstStyle/>
+          <a:p>
+            <a:endParaRPr lang="en-US" dirty="0"/>
+          </a:p>
+        </p:txBody>
+      </p:sp>
+      <p:sp>
+        <p:nvSpPr>
+          <p:cNvPr id="4" name="Slide Number Placeholder 3">
+            <a:extLst>
+              <a:ext uri="{FF2B5EF4-FFF2-40B4-BE49-F238E27FC236}">
+                <a16:creationId xmlns:a16="http://schemas.microsoft.com/office/drawing/2014/main" id="{8A14D7B2-B9E0-3888-825B-C816ABFA422C}"/>
+              </a:ext>
+            </a:extLst>
+          </p:cNvPr>
+          <p:cNvSpPr>
+            <a:spLocks noGrp="1"/>
+          </p:cNvSpPr>
+          <p:nvPr>
+            <p:ph type="sldNum" sz="quarter" idx="10"/>
+          </p:nvPr>
+        </p:nvSpPr>
+        <p:spPr/>
+        <p:txBody>
+          <a:bodyPr/>
+          <a:lstStyle/>
+          <a:p>
+            <a:fld id="{F7021451-1387-4CA6-816F-3879F97B5CBC}" type="slidenum">
+              <a:rPr lang="en-US"/>
+              <a:t>19</a:t>
+            </a:fld>
+            <a:endParaRPr lang="en-US"/>
+          </a:p>
+        </p:txBody>
+      </p:sp>
+    </p:spTree>
+    <p:extLst>
+      <p:ext uri="{BB962C8B-B14F-4D97-AF65-F5344CB8AC3E}">
+        <p14:creationId xmlns:p14="http://schemas.microsoft.com/office/powerpoint/2010/main" val="2287978834"/>
+      </p:ext>
+    </p:extLst>
+  </p:cSld>
+  <p:clrMapOvr>
+    <a:masterClrMapping/>
+  </p:clrMapOvr>
+</p:notes>
+</file>
+
 <file path=ppt/notesSlides/notesSlide2.xml><?xml version="1.0" encoding="utf-8"?>
 <p:notes xmlns:a="http://schemas.openxmlformats.org/drawingml/2006/main" xmlns:r="http://schemas.openxmlformats.org/officeDocument/2006/relationships" xmlns:p="http://schemas.openxmlformats.org/presentationml/2006/main">
   <p:cSld>
@@ -1222,6 +1585,222 @@
     <p:extLst>
       <p:ext uri="{BB962C8B-B14F-4D97-AF65-F5344CB8AC3E}">
         <p14:creationId xmlns:p14="http://schemas.microsoft.com/office/powerpoint/2010/main" val="1024086991"/>
+      </p:ext>
+    </p:extLst>
+  </p:cSld>
+  <p:clrMapOvr>
+    <a:masterClrMapping/>
+  </p:clrMapOvr>
+</p:notes>
+</file>
+
+<file path=ppt/notesSlides/notesSlide20.xml><?xml version="1.0" encoding="utf-8"?>
+<p:notes xmlns:a="http://schemas.openxmlformats.org/drawingml/2006/main" xmlns:r="http://schemas.openxmlformats.org/officeDocument/2006/relationships" xmlns:p="http://schemas.openxmlformats.org/presentationml/2006/main">
+  <p:cSld>
+    <p:spTree>
+      <p:nvGrpSpPr>
+        <p:cNvPr id="1" name="">
+          <a:extLst>
+            <a:ext uri="{FF2B5EF4-FFF2-40B4-BE49-F238E27FC236}">
+              <a16:creationId xmlns:a16="http://schemas.microsoft.com/office/drawing/2014/main" id="{CF9829D1-EDA9-5B92-7869-67F54BF3568C}"/>
+            </a:ext>
+          </a:extLst>
+        </p:cNvPr>
+        <p:cNvGrpSpPr/>
+        <p:nvPr/>
+      </p:nvGrpSpPr>
+      <p:grpSpPr>
+        <a:xfrm>
+          <a:off x="0" y="0"/>
+          <a:ext cx="0" cy="0"/>
+          <a:chOff x="0" y="0"/>
+          <a:chExt cx="0" cy="0"/>
+        </a:xfrm>
+      </p:grpSpPr>
+      <p:sp>
+        <p:nvSpPr>
+          <p:cNvPr id="2" name="Slide Image Placeholder 1">
+            <a:extLst>
+              <a:ext uri="{FF2B5EF4-FFF2-40B4-BE49-F238E27FC236}">
+                <a16:creationId xmlns:a16="http://schemas.microsoft.com/office/drawing/2014/main" id="{44DEF7AA-EE0C-D988-F4E8-34B34426F7D6}"/>
+              </a:ext>
+            </a:extLst>
+          </p:cNvPr>
+          <p:cNvSpPr>
+            <a:spLocks noGrp="1" noRot="1" noChangeAspect="1"/>
+          </p:cNvSpPr>
+          <p:nvPr>
+            <p:ph type="sldImg"/>
+          </p:nvPr>
+        </p:nvSpPr>
+        <p:spPr/>
+      </p:sp>
+      <p:sp>
+        <p:nvSpPr>
+          <p:cNvPr id="3" name="Notes Placeholder 2">
+            <a:extLst>
+              <a:ext uri="{FF2B5EF4-FFF2-40B4-BE49-F238E27FC236}">
+                <a16:creationId xmlns:a16="http://schemas.microsoft.com/office/drawing/2014/main" id="{C1CB136C-F19C-F0CD-FF37-1A9A7C73C648}"/>
+              </a:ext>
+            </a:extLst>
+          </p:cNvPr>
+          <p:cNvSpPr>
+            <a:spLocks noGrp="1"/>
+          </p:cNvSpPr>
+          <p:nvPr>
+            <p:ph type="body" idx="1"/>
+          </p:nvPr>
+        </p:nvSpPr>
+        <p:spPr/>
+        <p:txBody>
+          <a:bodyPr/>
+          <a:lstStyle/>
+          <a:p>
+            <a:endParaRPr lang="en-US" dirty="0"/>
+          </a:p>
+        </p:txBody>
+      </p:sp>
+      <p:sp>
+        <p:nvSpPr>
+          <p:cNvPr id="4" name="Slide Number Placeholder 3">
+            <a:extLst>
+              <a:ext uri="{FF2B5EF4-FFF2-40B4-BE49-F238E27FC236}">
+                <a16:creationId xmlns:a16="http://schemas.microsoft.com/office/drawing/2014/main" id="{DC4FA058-5A64-E9B5-BA28-7AC271A1C4A9}"/>
+              </a:ext>
+            </a:extLst>
+          </p:cNvPr>
+          <p:cNvSpPr>
+            <a:spLocks noGrp="1"/>
+          </p:cNvSpPr>
+          <p:nvPr>
+            <p:ph type="sldNum" sz="quarter" idx="10"/>
+          </p:nvPr>
+        </p:nvSpPr>
+        <p:spPr/>
+        <p:txBody>
+          <a:bodyPr/>
+          <a:lstStyle/>
+          <a:p>
+            <a:fld id="{F7021451-1387-4CA6-816F-3879F97B5CBC}" type="slidenum">
+              <a:rPr lang="en-US"/>
+              <a:t>20</a:t>
+            </a:fld>
+            <a:endParaRPr lang="en-US"/>
+          </a:p>
+        </p:txBody>
+      </p:sp>
+    </p:spTree>
+    <p:extLst>
+      <p:ext uri="{BB962C8B-B14F-4D97-AF65-F5344CB8AC3E}">
+        <p14:creationId xmlns:p14="http://schemas.microsoft.com/office/powerpoint/2010/main" val="3468527734"/>
+      </p:ext>
+    </p:extLst>
+  </p:cSld>
+  <p:clrMapOvr>
+    <a:masterClrMapping/>
+  </p:clrMapOvr>
+</p:notes>
+</file>
+
+<file path=ppt/notesSlides/notesSlide21.xml><?xml version="1.0" encoding="utf-8"?>
+<p:notes xmlns:a="http://schemas.openxmlformats.org/drawingml/2006/main" xmlns:r="http://schemas.openxmlformats.org/officeDocument/2006/relationships" xmlns:p="http://schemas.openxmlformats.org/presentationml/2006/main">
+  <p:cSld>
+    <p:spTree>
+      <p:nvGrpSpPr>
+        <p:cNvPr id="1" name="">
+          <a:extLst>
+            <a:ext uri="{FF2B5EF4-FFF2-40B4-BE49-F238E27FC236}">
+              <a16:creationId xmlns:a16="http://schemas.microsoft.com/office/drawing/2014/main" id="{6D163AE6-4EC6-D4FE-EB8C-A2B758401B51}"/>
+            </a:ext>
+          </a:extLst>
+        </p:cNvPr>
+        <p:cNvGrpSpPr/>
+        <p:nvPr/>
+      </p:nvGrpSpPr>
+      <p:grpSpPr>
+        <a:xfrm>
+          <a:off x="0" y="0"/>
+          <a:ext cx="0" cy="0"/>
+          <a:chOff x="0" y="0"/>
+          <a:chExt cx="0" cy="0"/>
+        </a:xfrm>
+      </p:grpSpPr>
+      <p:sp>
+        <p:nvSpPr>
+          <p:cNvPr id="2" name="Slide Image Placeholder 1">
+            <a:extLst>
+              <a:ext uri="{FF2B5EF4-FFF2-40B4-BE49-F238E27FC236}">
+                <a16:creationId xmlns:a16="http://schemas.microsoft.com/office/drawing/2014/main" id="{955A5D07-85E3-A493-A9C5-37DC5DD240ED}"/>
+              </a:ext>
+            </a:extLst>
+          </p:cNvPr>
+          <p:cNvSpPr>
+            <a:spLocks noGrp="1" noRot="1" noChangeAspect="1"/>
+          </p:cNvSpPr>
+          <p:nvPr>
+            <p:ph type="sldImg"/>
+          </p:nvPr>
+        </p:nvSpPr>
+        <p:spPr/>
+      </p:sp>
+      <p:sp>
+        <p:nvSpPr>
+          <p:cNvPr id="3" name="Notes Placeholder 2">
+            <a:extLst>
+              <a:ext uri="{FF2B5EF4-FFF2-40B4-BE49-F238E27FC236}">
+                <a16:creationId xmlns:a16="http://schemas.microsoft.com/office/drawing/2014/main" id="{ABB82549-F3E7-8A25-FDC0-87EAB33BE022}"/>
+              </a:ext>
+            </a:extLst>
+          </p:cNvPr>
+          <p:cNvSpPr>
+            <a:spLocks noGrp="1"/>
+          </p:cNvSpPr>
+          <p:nvPr>
+            <p:ph type="body" idx="1"/>
+          </p:nvPr>
+        </p:nvSpPr>
+        <p:spPr/>
+        <p:txBody>
+          <a:bodyPr/>
+          <a:lstStyle/>
+          <a:p>
+            <a:endParaRPr lang="en-US" dirty="0"/>
+          </a:p>
+        </p:txBody>
+      </p:sp>
+      <p:sp>
+        <p:nvSpPr>
+          <p:cNvPr id="4" name="Slide Number Placeholder 3">
+            <a:extLst>
+              <a:ext uri="{FF2B5EF4-FFF2-40B4-BE49-F238E27FC236}">
+                <a16:creationId xmlns:a16="http://schemas.microsoft.com/office/drawing/2014/main" id="{5315D587-15BE-606E-09DC-D0225FC5C94F}"/>
+              </a:ext>
+            </a:extLst>
+          </p:cNvPr>
+          <p:cNvSpPr>
+            <a:spLocks noGrp="1"/>
+          </p:cNvSpPr>
+          <p:nvPr>
+            <p:ph type="sldNum" sz="quarter" idx="10"/>
+          </p:nvPr>
+        </p:nvSpPr>
+        <p:spPr/>
+        <p:txBody>
+          <a:bodyPr/>
+          <a:lstStyle/>
+          <a:p>
+            <a:fld id="{F7021451-1387-4CA6-816F-3879F97B5CBC}" type="slidenum">
+              <a:rPr lang="en-US"/>
+              <a:t>21</a:t>
+            </a:fld>
+            <a:endParaRPr lang="en-US"/>
+          </a:p>
+        </p:txBody>
+      </p:sp>
+    </p:spTree>
+    <p:extLst>
+      <p:ext uri="{BB962C8B-B14F-4D97-AF65-F5344CB8AC3E}">
+        <p14:creationId xmlns:p14="http://schemas.microsoft.com/office/powerpoint/2010/main" val="1825332747"/>
       </p:ext>
     </p:extLst>
   </p:cSld>
@@ -13263,7 +13842,7 @@
         </p:nvSpPr>
         <p:spPr>
           <a:xfrm>
-            <a:off x="640080" y="960120"/>
+            <a:off x="640080" y="54639"/>
             <a:ext cx="8046720" cy="1051560"/>
           </a:xfrm>
           <a:prstGeom prst="rect">
@@ -13288,7 +13867,7 @@
                 <a:ea typeface="Calibri" pitchFamily="34" charset="-122"/>
                 <a:cs typeface="Calibri" pitchFamily="34" charset="-120"/>
               </a:rPr>
-              <a:t>Questions?</a:t>
+              <a:t>Bonus Tips</a:t>
             </a:r>
             <a:endParaRPr lang="en-US" sz="5600" dirty="0"/>
           </a:p>
@@ -13302,7 +13881,7 @@
         </p:nvSpPr>
         <p:spPr>
           <a:xfrm>
-            <a:off x="640080" y="2103120"/>
+            <a:off x="640080" y="941734"/>
             <a:ext cx="8046720" cy="411480"/>
           </a:xfrm>
           <a:prstGeom prst="rect">
@@ -13327,7 +13906,7 @@
                 <a:ea typeface="Calibri" pitchFamily="34" charset="-122"/>
                 <a:cs typeface="Calibri" pitchFamily="34" charset="-120"/>
               </a:rPr>
-              <a:t>TERRAFORM FUNDAMENTALS + AI STACK</a:t>
+              <a:t>Free Platform to Practice</a:t>
             </a:r>
             <a:endParaRPr lang="en-US" sz="1300" dirty="0"/>
           </a:p>
@@ -13341,7 +13920,7 @@
         </p:nvSpPr>
         <p:spPr>
           <a:xfrm>
-            <a:off x="640080" y="2606040"/>
+            <a:off x="640080" y="1255542"/>
             <a:ext cx="8229600" cy="36576"/>
           </a:xfrm>
           <a:prstGeom prst="rect">
@@ -13367,14 +13946,14 @@
       </p:sp>
       <p:sp>
         <p:nvSpPr>
-          <p:cNvPr id="6" name="Text 4"/>
-          <p:cNvSpPr/>
-          <p:nvPr/>
-        </p:nvSpPr>
-        <p:spPr>
-          <a:xfrm>
-            <a:off x="640080" y="2743200"/>
-            <a:ext cx="8046720" cy="1737360"/>
+          <p:cNvPr id="7" name="Text 5"/>
+          <p:cNvSpPr/>
+          <p:nvPr/>
+        </p:nvSpPr>
+        <p:spPr>
+          <a:xfrm>
+            <a:off x="640080" y="4736592"/>
+            <a:ext cx="7315200" cy="256032"/>
           </a:xfrm>
           <a:prstGeom prst="rect">
             <a:avLst/>
@@ -13387,10 +13966,1079 @@
           <a:lstStyle/>
           <a:p>
             <a:pPr marL="0" indent="0">
+              <a:buNone/>
+            </a:pPr>
+            <a:r>
+              <a:rPr lang="en-US" sz="1000" dirty="0">
+                <a:solidFill>
+                  <a:srgbClr val="546E7A"/>
+                </a:solidFill>
+                <a:latin typeface="Calibri" pitchFamily="34" charset="0"/>
+                <a:ea typeface="Calibri" pitchFamily="34" charset="-122"/>
+                <a:cs typeface="Calibri" pitchFamily="34" charset="-120"/>
+              </a:rPr>
+              <a:t>Infrastructure Team  |  Internal Training</a:t>
+            </a:r>
+            <a:endParaRPr lang="en-US" sz="1000" dirty="0"/>
+          </a:p>
+        </p:txBody>
+      </p:sp>
+      <p:graphicFrame>
+        <p:nvGraphicFramePr>
+          <p:cNvPr id="8" name="Table 7">
+            <a:extLst>
+              <a:ext uri="{FF2B5EF4-FFF2-40B4-BE49-F238E27FC236}">
+                <a16:creationId xmlns:a16="http://schemas.microsoft.com/office/drawing/2014/main" id="{D365D20E-B05A-A977-8DBA-A9600EC5D093}"/>
+              </a:ext>
+            </a:extLst>
+          </p:cNvPr>
+          <p:cNvGraphicFramePr>
+            <a:graphicFrameLocks noGrp="1"/>
+          </p:cNvGraphicFramePr>
+          <p:nvPr>
+            <p:extLst>
+              <p:ext uri="{D42A27DB-BD31-4B8C-83A1-F6EECF244321}">
+                <p14:modId xmlns:p14="http://schemas.microsoft.com/office/powerpoint/2010/main" val="1015931781"/>
+              </p:ext>
+            </p:extLst>
+          </p:nvPr>
+        </p:nvGraphicFramePr>
+        <p:xfrm>
+          <a:off x="935500" y="1335180"/>
+          <a:ext cx="7164755" cy="3340316"/>
+        </p:xfrm>
+        <a:graphic>
+          <a:graphicData uri="http://schemas.openxmlformats.org/drawingml/2006/table">
+            <a:tbl>
+              <a:tblPr firstRow="1" bandRow="1">
+                <a:tableStyleId>{125E5076-3810-47DD-B79F-674D7AD40C01}</a:tableStyleId>
+              </a:tblPr>
+              <a:tblGrid>
+                <a:gridCol w="1351280">
+                  <a:extLst>
+                    <a:ext uri="{9D8B030D-6E8A-4147-A177-3AD203B41FA5}">
+                      <a16:colId xmlns:a16="http://schemas.microsoft.com/office/drawing/2014/main" val="3574797562"/>
+                    </a:ext>
+                  </a:extLst>
+                </a:gridCol>
+                <a:gridCol w="1937825">
+                  <a:extLst>
+                    <a:ext uri="{9D8B030D-6E8A-4147-A177-3AD203B41FA5}">
+                      <a16:colId xmlns:a16="http://schemas.microsoft.com/office/drawing/2014/main" val="1141267328"/>
+                    </a:ext>
+                  </a:extLst>
+                </a:gridCol>
+                <a:gridCol w="1937825">
+                  <a:extLst>
+                    <a:ext uri="{9D8B030D-6E8A-4147-A177-3AD203B41FA5}">
+                      <a16:colId xmlns:a16="http://schemas.microsoft.com/office/drawing/2014/main" val="1297619649"/>
+                    </a:ext>
+                  </a:extLst>
+                </a:gridCol>
+                <a:gridCol w="1937825">
+                  <a:extLst>
+                    <a:ext uri="{9D8B030D-6E8A-4147-A177-3AD203B41FA5}">
+                      <a16:colId xmlns:a16="http://schemas.microsoft.com/office/drawing/2014/main" val="3940755232"/>
+                    </a:ext>
+                  </a:extLst>
+                </a:gridCol>
+              </a:tblGrid>
+              <a:tr h="272679">
+                <a:tc>
+                  <a:txBody>
+                    <a:bodyPr/>
+                    <a:lstStyle/>
+                    <a:p>
+                      <a:pPr>
+                        <a:buNone/>
+                      </a:pPr>
+                      <a:r>
+                        <a:rPr lang="en-AU" sz="1100" dirty="0"/>
+                        <a:t>Platform</a:t>
+                      </a:r>
+                    </a:p>
+                  </a:txBody>
+                  <a:tcPr anchor="ctr"/>
+                </a:tc>
+                <a:tc>
+                  <a:txBody>
+                    <a:bodyPr/>
+                    <a:lstStyle/>
+                    <a:p>
+                      <a:pPr>
+                        <a:buNone/>
+                      </a:pPr>
+                      <a:r>
+                        <a:rPr lang="en-AU" sz="1100"/>
+                        <a:t>Cost</a:t>
+                      </a:r>
+                    </a:p>
+                  </a:txBody>
+                  <a:tcPr anchor="ctr"/>
+                </a:tc>
+                <a:tc>
+                  <a:txBody>
+                    <a:bodyPr/>
+                    <a:lstStyle/>
+                    <a:p>
+                      <a:pPr>
+                        <a:buNone/>
+                      </a:pPr>
+                      <a:r>
+                        <a:rPr lang="en-AU" sz="1100"/>
+                        <a:t>Setup</a:t>
+                      </a:r>
+                    </a:p>
+                  </a:txBody>
+                  <a:tcPr anchor="ctr"/>
+                </a:tc>
+                <a:tc>
+                  <a:txBody>
+                    <a:bodyPr/>
+                    <a:lstStyle/>
+                    <a:p>
+                      <a:pPr>
+                        <a:buNone/>
+                      </a:pPr>
+                      <a:r>
+                        <a:rPr lang="en-AU" sz="1100"/>
+                        <a:t>Cloud Type</a:t>
+                      </a:r>
+                    </a:p>
+                  </a:txBody>
+                  <a:tcPr anchor="ctr"/>
+                </a:tc>
+                <a:extLst>
+                  <a:ext uri="{0D108BD9-81ED-4DB2-BD59-A6C34878D82A}">
+                    <a16:rowId xmlns:a16="http://schemas.microsoft.com/office/drawing/2014/main" val="3162454391"/>
+                  </a:ext>
+                </a:extLst>
+              </a:tr>
+              <a:tr h="681697">
+                <a:tc>
+                  <a:txBody>
+                    <a:bodyPr/>
+                    <a:lstStyle/>
+                    <a:p>
+                      <a:pPr>
+                        <a:buNone/>
+                      </a:pPr>
+                      <a:r>
+                        <a:rPr lang="en-AU" sz="1100" b="1" dirty="0" err="1"/>
+                        <a:t>HashiCorp</a:t>
+                      </a:r>
+                      <a:r>
+                        <a:rPr lang="en-AU" sz="1100" b="1" dirty="0"/>
+                        <a:t> Sandbox</a:t>
+                      </a:r>
+                    </a:p>
+                    <a:p>
+                      <a:pPr>
+                        <a:buNone/>
+                      </a:pPr>
+                      <a:endParaRPr lang="en-AU" sz="1100" dirty="0"/>
+                    </a:p>
+                  </a:txBody>
+                  <a:tcPr anchor="ctr"/>
+                </a:tc>
+                <a:tc>
+                  <a:txBody>
+                    <a:bodyPr/>
+                    <a:lstStyle/>
+                    <a:p>
+                      <a:pPr>
+                        <a:buNone/>
+                      </a:pPr>
+                      <a:r>
+                        <a:rPr lang="en-AU" sz="1100" dirty="0"/>
+                        <a:t>✅ Free</a:t>
+                      </a:r>
+                    </a:p>
+                  </a:txBody>
+                  <a:tcPr anchor="ctr"/>
+                </a:tc>
+                <a:tc>
+                  <a:txBody>
+                    <a:bodyPr/>
+                    <a:lstStyle/>
+                    <a:p>
+                      <a:pPr>
+                        <a:buNone/>
+                      </a:pPr>
+                      <a:r>
+                        <a:rPr lang="en-AU" sz="1100"/>
+                        <a:t>None</a:t>
+                      </a:r>
+                    </a:p>
+                  </a:txBody>
+                  <a:tcPr anchor="ctr"/>
+                </a:tc>
+                <a:tc>
+                  <a:txBody>
+                    <a:bodyPr/>
+                    <a:lstStyle/>
+                    <a:p>
+                      <a:pPr>
+                        <a:buNone/>
+                      </a:pPr>
+                      <a:r>
+                        <a:rPr lang="en-AU" sz="1100"/>
+                        <a:t>LocalStack (AWS simulation)</a:t>
+                      </a:r>
+                    </a:p>
+                  </a:txBody>
+                  <a:tcPr anchor="ctr"/>
+                </a:tc>
+                <a:extLst>
+                  <a:ext uri="{0D108BD9-81ED-4DB2-BD59-A6C34878D82A}">
+                    <a16:rowId xmlns:a16="http://schemas.microsoft.com/office/drawing/2014/main" val="1946008914"/>
+                  </a:ext>
+                </a:extLst>
+              </a:tr>
+              <a:tr h="477188">
+                <a:tc>
+                  <a:txBody>
+                    <a:bodyPr/>
+                    <a:lstStyle/>
+                    <a:p>
+                      <a:pPr>
+                        <a:buNone/>
+                      </a:pPr>
+                      <a:r>
+                        <a:rPr lang="en-AU" sz="1100" b="1" dirty="0"/>
+                        <a:t>AWS Free Tier</a:t>
+                      </a:r>
+                      <a:endParaRPr lang="en-AU" sz="1100" dirty="0"/>
+                    </a:p>
+                  </a:txBody>
+                  <a:tcPr anchor="ctr"/>
+                </a:tc>
+                <a:tc>
+                  <a:txBody>
+                    <a:bodyPr/>
+                    <a:lstStyle/>
+                    <a:p>
+                      <a:pPr>
+                        <a:buNone/>
+                      </a:pPr>
+                      <a:r>
+                        <a:rPr lang="en-AU" sz="1100"/>
+                        <a:t>✅ $200 credits</a:t>
+                      </a:r>
+                    </a:p>
+                  </a:txBody>
+                  <a:tcPr anchor="ctr"/>
+                </a:tc>
+                <a:tc>
+                  <a:txBody>
+                    <a:bodyPr/>
+                    <a:lstStyle/>
+                    <a:p>
+                      <a:pPr>
+                        <a:buNone/>
+                      </a:pPr>
+                      <a:r>
+                        <a:rPr lang="en-AU" sz="1100"/>
+                        <a:t>5 min</a:t>
+                      </a:r>
+                    </a:p>
+                  </a:txBody>
+                  <a:tcPr anchor="ctr"/>
+                </a:tc>
+                <a:tc>
+                  <a:txBody>
+                    <a:bodyPr/>
+                    <a:lstStyle/>
+                    <a:p>
+                      <a:pPr>
+                        <a:buNone/>
+                      </a:pPr>
+                      <a:r>
+                        <a:rPr lang="en-AU" sz="1100"/>
+                        <a:t>Real AWS</a:t>
+                      </a:r>
+                    </a:p>
+                  </a:txBody>
+                  <a:tcPr anchor="ctr"/>
+                </a:tc>
+                <a:extLst>
+                  <a:ext uri="{0D108BD9-81ED-4DB2-BD59-A6C34878D82A}">
+                    <a16:rowId xmlns:a16="http://schemas.microsoft.com/office/drawing/2014/main" val="1168505814"/>
+                  </a:ext>
+                </a:extLst>
+              </a:tr>
+              <a:tr h="477188">
+                <a:tc>
+                  <a:txBody>
+                    <a:bodyPr/>
+                    <a:lstStyle/>
+                    <a:p>
+                      <a:pPr>
+                        <a:buNone/>
+                      </a:pPr>
+                      <a:r>
+                        <a:rPr lang="en-AU" sz="1100" b="1"/>
+                        <a:t>GCP Free Trial</a:t>
+                      </a:r>
+                      <a:endParaRPr lang="en-AU" sz="1100"/>
+                    </a:p>
+                  </a:txBody>
+                  <a:tcPr anchor="ctr"/>
+                </a:tc>
+                <a:tc>
+                  <a:txBody>
+                    <a:bodyPr/>
+                    <a:lstStyle/>
+                    <a:p>
+                      <a:pPr>
+                        <a:buNone/>
+                      </a:pPr>
+                      <a:r>
+                        <a:rPr lang="en-AU" sz="1100"/>
+                        <a:t>✅ $300 credits</a:t>
+                      </a:r>
+                    </a:p>
+                  </a:txBody>
+                  <a:tcPr anchor="ctr"/>
+                </a:tc>
+                <a:tc>
+                  <a:txBody>
+                    <a:bodyPr/>
+                    <a:lstStyle/>
+                    <a:p>
+                      <a:pPr>
+                        <a:buNone/>
+                      </a:pPr>
+                      <a:r>
+                        <a:rPr lang="en-AU" sz="1100"/>
+                        <a:t>5 min</a:t>
+                      </a:r>
+                    </a:p>
+                  </a:txBody>
+                  <a:tcPr anchor="ctr"/>
+                </a:tc>
+                <a:tc>
+                  <a:txBody>
+                    <a:bodyPr/>
+                    <a:lstStyle/>
+                    <a:p>
+                      <a:pPr>
+                        <a:buNone/>
+                      </a:pPr>
+                      <a:r>
+                        <a:rPr lang="en-AU" sz="1100"/>
+                        <a:t>Real GCP</a:t>
+                      </a:r>
+                    </a:p>
+                  </a:txBody>
+                  <a:tcPr anchor="ctr"/>
+                </a:tc>
+                <a:extLst>
+                  <a:ext uri="{0D108BD9-81ED-4DB2-BD59-A6C34878D82A}">
+                    <a16:rowId xmlns:a16="http://schemas.microsoft.com/office/drawing/2014/main" val="4284037885"/>
+                  </a:ext>
+                </a:extLst>
+              </a:tr>
+              <a:tr h="477188">
+                <a:tc>
+                  <a:txBody>
+                    <a:bodyPr/>
+                    <a:lstStyle/>
+                    <a:p>
+                      <a:pPr>
+                        <a:buNone/>
+                      </a:pPr>
+                      <a:r>
+                        <a:rPr lang="en-AU" sz="1100" b="1"/>
+                        <a:t>Terraform CLI</a:t>
+                      </a:r>
+                      <a:endParaRPr lang="en-AU" sz="1100"/>
+                    </a:p>
+                  </a:txBody>
+                  <a:tcPr anchor="ctr"/>
+                </a:tc>
+                <a:tc>
+                  <a:txBody>
+                    <a:bodyPr/>
+                    <a:lstStyle/>
+                    <a:p>
+                      <a:pPr>
+                        <a:buNone/>
+                      </a:pPr>
+                      <a:r>
+                        <a:rPr lang="en-AU" sz="1100"/>
+                        <a:t>✅ Free Forever</a:t>
+                      </a:r>
+                    </a:p>
+                  </a:txBody>
+                  <a:tcPr anchor="ctr"/>
+                </a:tc>
+                <a:tc>
+                  <a:txBody>
+                    <a:bodyPr/>
+                    <a:lstStyle/>
+                    <a:p>
+                      <a:pPr>
+                        <a:buNone/>
+                      </a:pPr>
+                      <a:r>
+                        <a:rPr lang="en-AU" sz="1100"/>
+                        <a:t>Your VM</a:t>
+                      </a:r>
+                    </a:p>
+                  </a:txBody>
+                  <a:tcPr anchor="ctr"/>
+                </a:tc>
+                <a:tc>
+                  <a:txBody>
+                    <a:bodyPr/>
+                    <a:lstStyle/>
+                    <a:p>
+                      <a:pPr>
+                        <a:buNone/>
+                      </a:pPr>
+                      <a:r>
+                        <a:rPr lang="en-AU" sz="1100"/>
+                        <a:t>Local/Real clouds</a:t>
+                      </a:r>
+                    </a:p>
+                  </a:txBody>
+                  <a:tcPr anchor="ctr"/>
+                </a:tc>
+                <a:extLst>
+                  <a:ext uri="{0D108BD9-81ED-4DB2-BD59-A6C34878D82A}">
+                    <a16:rowId xmlns:a16="http://schemas.microsoft.com/office/drawing/2014/main" val="1897264294"/>
+                  </a:ext>
+                </a:extLst>
+              </a:tr>
+              <a:tr h="477188">
+                <a:tc>
+                  <a:txBody>
+                    <a:bodyPr/>
+                    <a:lstStyle/>
+                    <a:p>
+                      <a:pPr>
+                        <a:buNone/>
+                      </a:pPr>
+                      <a:r>
+                        <a:rPr lang="en-AU" sz="1100" b="1"/>
+                        <a:t>Learn Git Branching</a:t>
+                      </a:r>
+                      <a:endParaRPr lang="en-AU" sz="1100"/>
+                    </a:p>
+                  </a:txBody>
+                  <a:tcPr anchor="ctr"/>
+                </a:tc>
+                <a:tc>
+                  <a:txBody>
+                    <a:bodyPr/>
+                    <a:lstStyle/>
+                    <a:p>
+                      <a:pPr>
+                        <a:buNone/>
+                      </a:pPr>
+                      <a:r>
+                        <a:rPr lang="en-AU" sz="1100"/>
+                        <a:t>✅ Free</a:t>
+                      </a:r>
+                    </a:p>
+                  </a:txBody>
+                  <a:tcPr anchor="ctr"/>
+                </a:tc>
+                <a:tc>
+                  <a:txBody>
+                    <a:bodyPr/>
+                    <a:lstStyle/>
+                    <a:p>
+                      <a:pPr>
+                        <a:buNone/>
+                      </a:pPr>
+                      <a:r>
+                        <a:rPr lang="en-AU" sz="1100"/>
+                        <a:t>None</a:t>
+                      </a:r>
+                    </a:p>
+                  </a:txBody>
+                  <a:tcPr anchor="ctr"/>
+                </a:tc>
+                <a:tc>
+                  <a:txBody>
+                    <a:bodyPr/>
+                    <a:lstStyle/>
+                    <a:p>
+                      <a:pPr>
+                        <a:buNone/>
+                      </a:pPr>
+                      <a:r>
+                        <a:rPr lang="en-AU" sz="1100"/>
+                        <a:t>Browser</a:t>
+                      </a:r>
+                    </a:p>
+                  </a:txBody>
+                  <a:tcPr anchor="ctr"/>
+                </a:tc>
+                <a:extLst>
+                  <a:ext uri="{0D108BD9-81ED-4DB2-BD59-A6C34878D82A}">
+                    <a16:rowId xmlns:a16="http://schemas.microsoft.com/office/drawing/2014/main" val="3974952023"/>
+                  </a:ext>
+                </a:extLst>
+              </a:tr>
+              <a:tr h="477188">
+                <a:tc>
+                  <a:txBody>
+                    <a:bodyPr/>
+                    <a:lstStyle/>
+                    <a:p>
+                      <a:pPr>
+                        <a:buNone/>
+                      </a:pPr>
+                      <a:r>
+                        <a:rPr lang="en-AU" sz="1100" b="1"/>
+                        <a:t>GitHub Skills</a:t>
+                      </a:r>
+                      <a:endParaRPr lang="en-AU" sz="1100"/>
+                    </a:p>
+                  </a:txBody>
+                  <a:tcPr anchor="ctr"/>
+                </a:tc>
+                <a:tc>
+                  <a:txBody>
+                    <a:bodyPr/>
+                    <a:lstStyle/>
+                    <a:p>
+                      <a:pPr>
+                        <a:buNone/>
+                      </a:pPr>
+                      <a:r>
+                        <a:rPr lang="en-AU" sz="1100" dirty="0"/>
+                        <a:t>✅ Free</a:t>
+                      </a:r>
+                    </a:p>
+                  </a:txBody>
+                  <a:tcPr anchor="ctr"/>
+                </a:tc>
+                <a:tc>
+                  <a:txBody>
+                    <a:bodyPr/>
+                    <a:lstStyle/>
+                    <a:p>
+                      <a:pPr>
+                        <a:buNone/>
+                      </a:pPr>
+                      <a:r>
+                        <a:rPr lang="en-AU" sz="1100"/>
+                        <a:t>GitHub account</a:t>
+                      </a:r>
+                    </a:p>
+                  </a:txBody>
+                  <a:tcPr anchor="ctr"/>
+                </a:tc>
+                <a:tc>
+                  <a:txBody>
+                    <a:bodyPr/>
+                    <a:lstStyle/>
+                    <a:p>
+                      <a:pPr>
+                        <a:buNone/>
+                      </a:pPr>
+                      <a:r>
+                        <a:rPr lang="en-AU" sz="1100" dirty="0"/>
+                        <a:t>Browser</a:t>
+                      </a:r>
+                    </a:p>
+                  </a:txBody>
+                  <a:tcPr anchor="ctr"/>
+                </a:tc>
+                <a:extLst>
+                  <a:ext uri="{0D108BD9-81ED-4DB2-BD59-A6C34878D82A}">
+                    <a16:rowId xmlns:a16="http://schemas.microsoft.com/office/drawing/2014/main" val="525036652"/>
+                  </a:ext>
+                </a:extLst>
+              </a:tr>
+            </a:tbl>
+          </a:graphicData>
+        </a:graphic>
+      </p:graphicFrame>
+    </p:spTree>
+  </p:cSld>
+  <p:clrMapOvr>
+    <a:masterClrMapping/>
+  </p:clrMapOvr>
+</p:sld>
+</file>
+
+<file path=ppt/slides/slide19.xml><?xml version="1.0" encoding="utf-8"?>
+<p:sld xmlns:a="http://schemas.openxmlformats.org/drawingml/2006/main" xmlns:r="http://schemas.openxmlformats.org/officeDocument/2006/relationships" xmlns:p="http://schemas.openxmlformats.org/presentationml/2006/main">
+  <p:cSld>
+    <p:bg>
+      <p:bgPr>
+        <a:solidFill>
+          <a:srgbClr val="0D1B2A"/>
+        </a:solidFill>
+        <a:effectLst/>
+      </p:bgPr>
+    </p:bg>
+    <p:spTree>
+      <p:nvGrpSpPr>
+        <p:cNvPr id="1" name="">
+          <a:extLst>
+            <a:ext uri="{FF2B5EF4-FFF2-40B4-BE49-F238E27FC236}">
+              <a16:creationId xmlns:a16="http://schemas.microsoft.com/office/drawing/2014/main" id="{0E580C98-3EE5-649D-EF12-B92337E164C2}"/>
+            </a:ext>
+          </a:extLst>
+        </p:cNvPr>
+        <p:cNvGrpSpPr/>
+        <p:nvPr/>
+      </p:nvGrpSpPr>
+      <p:grpSpPr>
+        <a:xfrm>
+          <a:off x="0" y="0"/>
+          <a:ext cx="0" cy="0"/>
+          <a:chOff x="0" y="0"/>
+          <a:chExt cx="0" cy="0"/>
+        </a:xfrm>
+      </p:grpSpPr>
+      <p:sp>
+        <p:nvSpPr>
+          <p:cNvPr id="2" name="Shape 0">
+            <a:extLst>
+              <a:ext uri="{FF2B5EF4-FFF2-40B4-BE49-F238E27FC236}">
+                <a16:creationId xmlns:a16="http://schemas.microsoft.com/office/drawing/2014/main" id="{AA262F9C-E7ED-8FA5-4EFF-58F8F29FABBF}"/>
+              </a:ext>
+            </a:extLst>
+          </p:cNvPr>
+          <p:cNvSpPr/>
+          <p:nvPr/>
+        </p:nvSpPr>
+        <p:spPr>
+          <a:xfrm>
+            <a:off x="0" y="0"/>
+            <a:ext cx="274320" cy="5143500"/>
+          </a:xfrm>
+          <a:prstGeom prst="rect">
+            <a:avLst/>
+          </a:prstGeom>
+          <a:solidFill>
+            <a:srgbClr val="00ACC1"/>
+          </a:solidFill>
+          <a:ln w="12700">
+            <a:solidFill>
+              <a:srgbClr val="00ACC1"/>
+            </a:solidFill>
+            <a:prstDash val="solid"/>
+          </a:ln>
+        </p:spPr>
+        <p:txBody>
+          <a:bodyPr/>
+          <a:lstStyle/>
+          <a:p>
+            <a:endParaRPr lang="en-AU"/>
+          </a:p>
+        </p:txBody>
+      </p:sp>
+      <p:sp>
+        <p:nvSpPr>
+          <p:cNvPr id="3" name="Text 1">
+            <a:extLst>
+              <a:ext uri="{FF2B5EF4-FFF2-40B4-BE49-F238E27FC236}">
+                <a16:creationId xmlns:a16="http://schemas.microsoft.com/office/drawing/2014/main" id="{6B1C514B-B70A-CD7E-3233-DBE09070D6EF}"/>
+              </a:ext>
+            </a:extLst>
+          </p:cNvPr>
+          <p:cNvSpPr/>
+          <p:nvPr/>
+        </p:nvSpPr>
+        <p:spPr>
+          <a:xfrm>
+            <a:off x="640080" y="73855"/>
+            <a:ext cx="7835705" cy="845820"/>
+          </a:xfrm>
+          <a:prstGeom prst="rect">
+            <a:avLst/>
+          </a:prstGeom>
+          <a:noFill/>
+          <a:ln/>
+        </p:spPr>
+        <p:txBody>
+          <a:bodyPr wrap="square" rtlCol="0" anchor="ctr"/>
+          <a:lstStyle/>
+          <a:p>
+            <a:pPr marL="0" indent="0">
+              <a:buNone/>
+            </a:pPr>
+            <a:r>
+              <a:rPr lang="en-US" sz="5600" b="1" dirty="0">
+                <a:solidFill>
+                  <a:srgbClr val="FFFFFF"/>
+                </a:solidFill>
+                <a:latin typeface="Calibri" pitchFamily="34" charset="0"/>
+                <a:ea typeface="Calibri" pitchFamily="34" charset="-122"/>
+                <a:cs typeface="Calibri" pitchFamily="34" charset="-120"/>
+              </a:rPr>
+              <a:t>Useful URL</a:t>
+            </a:r>
+            <a:endParaRPr lang="en-US" sz="5600" dirty="0"/>
+          </a:p>
+        </p:txBody>
+      </p:sp>
+      <p:sp>
+        <p:nvSpPr>
+          <p:cNvPr id="4" name="Text 2">
+            <a:extLst>
+              <a:ext uri="{FF2B5EF4-FFF2-40B4-BE49-F238E27FC236}">
+                <a16:creationId xmlns:a16="http://schemas.microsoft.com/office/drawing/2014/main" id="{A1392743-2E8C-B4F5-5B66-D39449455816}"/>
+              </a:ext>
+            </a:extLst>
+          </p:cNvPr>
+          <p:cNvSpPr/>
+          <p:nvPr/>
+        </p:nvSpPr>
+        <p:spPr>
+          <a:xfrm>
+            <a:off x="548640" y="738382"/>
+            <a:ext cx="8046720" cy="411480"/>
+          </a:xfrm>
+          <a:prstGeom prst="rect">
+            <a:avLst/>
+          </a:prstGeom>
+          <a:noFill/>
+          <a:ln/>
+        </p:spPr>
+        <p:txBody>
+          <a:bodyPr wrap="square" rtlCol="0" anchor="ctr"/>
+          <a:lstStyle/>
+          <a:p>
+            <a:pPr marL="0" indent="0">
+              <a:buNone/>
+            </a:pPr>
+            <a:r>
+              <a:rPr lang="en-US" sz="1300" kern="0" spc="500" dirty="0">
+                <a:solidFill>
+                  <a:srgbClr val="00ACC1"/>
+                </a:solidFill>
+                <a:latin typeface="Calibri" pitchFamily="34" charset="0"/>
+                <a:ea typeface="Calibri" pitchFamily="34" charset="-122"/>
+                <a:cs typeface="Calibri" pitchFamily="34" charset="-120"/>
+              </a:rPr>
+              <a:t>TERRAFORM FUNDAMENTALS + AI STACK</a:t>
+            </a:r>
+            <a:endParaRPr lang="en-US" sz="1300" dirty="0"/>
+          </a:p>
+        </p:txBody>
+      </p:sp>
+      <p:sp>
+        <p:nvSpPr>
+          <p:cNvPr id="5" name="Shape 3">
+            <a:extLst>
+              <a:ext uri="{FF2B5EF4-FFF2-40B4-BE49-F238E27FC236}">
+                <a16:creationId xmlns:a16="http://schemas.microsoft.com/office/drawing/2014/main" id="{B64729F2-249F-2C13-3D23-5B6CFB19CEC8}"/>
+              </a:ext>
+            </a:extLst>
+          </p:cNvPr>
+          <p:cNvSpPr/>
+          <p:nvPr/>
+        </p:nvSpPr>
+        <p:spPr>
+          <a:xfrm>
+            <a:off x="640080" y="1044529"/>
+            <a:ext cx="8229600" cy="36576"/>
+          </a:xfrm>
+          <a:prstGeom prst="rect">
+            <a:avLst/>
+          </a:prstGeom>
+          <a:solidFill>
+            <a:srgbClr val="263238"/>
+          </a:solidFill>
+          <a:ln w="12700">
+            <a:solidFill>
+              <a:srgbClr val="263238"/>
+            </a:solidFill>
+            <a:prstDash val="solid"/>
+          </a:ln>
+        </p:spPr>
+        <p:txBody>
+          <a:bodyPr/>
+          <a:lstStyle/>
+          <a:p>
+            <a:endParaRPr lang="en-AU"/>
+          </a:p>
+        </p:txBody>
+      </p:sp>
+      <p:sp>
+        <p:nvSpPr>
+          <p:cNvPr id="6" name="Text 4">
+            <a:extLst>
+              <a:ext uri="{FF2B5EF4-FFF2-40B4-BE49-F238E27FC236}">
+                <a16:creationId xmlns:a16="http://schemas.microsoft.com/office/drawing/2014/main" id="{FA6FF5E9-DB59-43FD-24CC-C3C83052CD3F}"/>
+              </a:ext>
+            </a:extLst>
+          </p:cNvPr>
+          <p:cNvSpPr/>
+          <p:nvPr/>
+        </p:nvSpPr>
+        <p:spPr>
+          <a:xfrm>
+            <a:off x="640080" y="1703840"/>
+            <a:ext cx="8046720" cy="3040376"/>
+          </a:xfrm>
+          <a:prstGeom prst="rect">
+            <a:avLst/>
+          </a:prstGeom>
+          <a:noFill/>
+          <a:ln/>
+        </p:spPr>
+        <p:txBody>
+          <a:bodyPr wrap="square" rtlCol="0" anchor="ctr"/>
+          <a:lstStyle/>
+          <a:p>
+            <a:r>
+              <a:rPr lang="en-US" sz="1150" dirty="0">
+                <a:solidFill>
+                  <a:srgbClr val="90CAF9"/>
+                </a:solidFill>
+                <a:latin typeface="Calibri" pitchFamily="34" charset="0"/>
+                <a:ea typeface="Calibri" pitchFamily="34" charset="-122"/>
+                <a:cs typeface="Calibri" pitchFamily="34" charset="-120"/>
+              </a:rPr>
+              <a:t>📖  </a:t>
+            </a:r>
+            <a:r>
+              <a:rPr lang="en-AU" sz="1150" dirty="0" err="1">
+                <a:solidFill>
+                  <a:srgbClr val="90CAF9"/>
+                </a:solidFill>
+                <a:latin typeface="Calibri" pitchFamily="34" charset="0"/>
+                <a:ea typeface="Calibri" pitchFamily="34" charset="-122"/>
+                <a:cs typeface="Calibri" pitchFamily="34" charset="-120"/>
+              </a:rPr>
+              <a:t>HashiCorp</a:t>
+            </a:r>
+            <a:r>
+              <a:rPr lang="en-AU" sz="1150" dirty="0">
+                <a:solidFill>
+                  <a:srgbClr val="90CAF9"/>
+                </a:solidFill>
+                <a:latin typeface="Calibri" pitchFamily="34" charset="0"/>
+                <a:ea typeface="Calibri" pitchFamily="34" charset="-122"/>
+                <a:cs typeface="Calibri" pitchFamily="34" charset="-120"/>
+              </a:rPr>
+              <a:t> Terraform Sandbox (BEST - No Setup Required) : </a:t>
+            </a:r>
+            <a:r>
+              <a:rPr lang="en-AU" sz="1200" dirty="0"/>
+              <a:t> </a:t>
+            </a:r>
+            <a:r>
+              <a:rPr lang="en-AU" sz="1200" dirty="0">
+                <a:hlinkClick r:id="rId3"/>
+              </a:rPr>
+              <a:t>https://developer.hashicorp.com/terraform/tutorials/sandbox</a:t>
+            </a:r>
+            <a:br>
+              <a:rPr lang="en-AU" sz="1200" dirty="0"/>
+            </a:br>
+            <a:r>
+              <a:rPr lang="en-US" sz="1150" dirty="0">
+                <a:solidFill>
+                  <a:srgbClr val="90CAF9"/>
+                </a:solidFill>
+                <a:latin typeface="Calibri" pitchFamily="34" charset="0"/>
+                <a:ea typeface="Calibri" pitchFamily="34" charset="-122"/>
+                <a:cs typeface="Calibri" pitchFamily="34" charset="-120"/>
+              </a:rPr>
+              <a:t>📖  </a:t>
+            </a:r>
+            <a:r>
+              <a:rPr lang="en-AU" sz="1150" dirty="0">
+                <a:solidFill>
+                  <a:srgbClr val="90CAF9"/>
+                </a:solidFill>
+                <a:latin typeface="Calibri" pitchFamily="34" charset="0"/>
+                <a:ea typeface="Calibri" pitchFamily="34" charset="-122"/>
+                <a:cs typeface="Calibri" pitchFamily="34" charset="-120"/>
+              </a:rPr>
+              <a:t>AWS Free Tier ($200 Free Credits) : </a:t>
+            </a:r>
+            <a:r>
+              <a:rPr lang="en-AU" sz="1200" dirty="0"/>
+              <a:t> </a:t>
+            </a:r>
+            <a:r>
+              <a:rPr lang="en-AU" sz="1200" dirty="0">
+                <a:hlinkClick r:id="rId4"/>
+              </a:rPr>
+              <a:t>https://aws.amazon.com/free/</a:t>
+            </a:r>
+            <a:br>
+              <a:rPr lang="en-AU" sz="1200" dirty="0"/>
+            </a:br>
+            <a:r>
+              <a:rPr lang="en-US" sz="1150" dirty="0">
+                <a:solidFill>
+                  <a:srgbClr val="90CAF9"/>
+                </a:solidFill>
+                <a:latin typeface="Calibri" pitchFamily="34" charset="0"/>
+                <a:ea typeface="Calibri" pitchFamily="34" charset="-122"/>
+                <a:cs typeface="Calibri" pitchFamily="34" charset="-120"/>
+              </a:rPr>
+              <a:t>📖  </a:t>
+            </a:r>
+            <a:r>
+              <a:rPr lang="en-AU" sz="1150" dirty="0">
+                <a:solidFill>
+                  <a:srgbClr val="90CAF9"/>
+                </a:solidFill>
+                <a:latin typeface="Calibri" pitchFamily="34" charset="0"/>
+                <a:ea typeface="Calibri" pitchFamily="34" charset="-122"/>
+                <a:cs typeface="Calibri" pitchFamily="34" charset="-120"/>
+              </a:rPr>
+              <a:t>Google Cloud Free Trial ($300 Free Credits): </a:t>
+            </a:r>
+            <a:r>
+              <a:rPr lang="en-AU" sz="1200" dirty="0"/>
+              <a:t> </a:t>
+            </a:r>
+            <a:r>
+              <a:rPr lang="en-AU" sz="1200" dirty="0">
+                <a:hlinkClick r:id="rId5"/>
+              </a:rPr>
+              <a:t>https://cloud.google.com/free</a:t>
+            </a:r>
+            <a:br>
+              <a:rPr lang="en-AU" sz="1200" dirty="0"/>
+            </a:br>
+            <a:r>
+              <a:rPr lang="en-US" sz="1150" dirty="0">
+                <a:solidFill>
+                  <a:srgbClr val="90CAF9"/>
+                </a:solidFill>
+                <a:latin typeface="Calibri" pitchFamily="34" charset="0"/>
+                <a:ea typeface="Calibri" pitchFamily="34" charset="-122"/>
+                <a:cs typeface="Calibri" pitchFamily="34" charset="-120"/>
+              </a:rPr>
+              <a:t>📖 </a:t>
+            </a:r>
+            <a:r>
+              <a:rPr lang="en-AU" sz="1150" dirty="0">
+                <a:solidFill>
+                  <a:srgbClr val="90CAF9"/>
+                </a:solidFill>
+                <a:latin typeface="Calibri" pitchFamily="34" charset="0"/>
+                <a:ea typeface="Calibri" pitchFamily="34" charset="-122"/>
+                <a:cs typeface="Calibri" pitchFamily="34" charset="-120"/>
+              </a:rPr>
+              <a:t>Azure Free Tier ($200 Free Credits) : </a:t>
+            </a:r>
+            <a:r>
+              <a:rPr lang="en-AU" sz="1200" dirty="0"/>
+              <a:t> </a:t>
+            </a:r>
+            <a:r>
+              <a:rPr lang="en-AU" sz="1200" dirty="0">
+                <a:hlinkClick r:id="rId6"/>
+              </a:rPr>
+              <a:t>https://azure.microsoft.com/en-au/free/</a:t>
+            </a:r>
+            <a:br>
+              <a:rPr lang="en-AU" sz="1200" dirty="0"/>
+            </a:br>
+            <a:r>
+              <a:rPr lang="en-US" sz="1150" dirty="0">
+                <a:solidFill>
+                  <a:srgbClr val="90CAF9"/>
+                </a:solidFill>
+                <a:latin typeface="Calibri" pitchFamily="34" charset="0"/>
+                <a:ea typeface="Calibri" pitchFamily="34" charset="-122"/>
+                <a:cs typeface="Calibri" pitchFamily="34" charset="-120"/>
+              </a:rPr>
+              <a:t>📖 </a:t>
+            </a:r>
+            <a:r>
+              <a:rPr lang="en-AU" sz="1150" dirty="0">
+                <a:solidFill>
+                  <a:srgbClr val="90CAF9"/>
+                </a:solidFill>
+                <a:latin typeface="Calibri" pitchFamily="34" charset="0"/>
+                <a:ea typeface="Calibri" pitchFamily="34" charset="-122"/>
+                <a:cs typeface="Calibri" pitchFamily="34" charset="-120"/>
+              </a:rPr>
+              <a:t>Learn Git Branching (Interactive &amp; Free): </a:t>
+            </a:r>
+            <a:r>
+              <a:rPr lang="en-AU" sz="1200" dirty="0"/>
+              <a:t> </a:t>
+            </a:r>
+            <a:r>
+              <a:rPr lang="en-AU" sz="1200" dirty="0">
+                <a:hlinkClick r:id="rId7"/>
+              </a:rPr>
+              <a:t>https://learngitbranching.js.org/</a:t>
+            </a:r>
+            <a:endParaRPr lang="en-AU" sz="1200" dirty="0"/>
+          </a:p>
+          <a:p>
+            <a:r>
+              <a:rPr lang="en-US" sz="1150" dirty="0">
+                <a:solidFill>
+                  <a:srgbClr val="90CAF9"/>
+                </a:solidFill>
+                <a:latin typeface="Calibri" pitchFamily="34" charset="0"/>
+                <a:ea typeface="Calibri" pitchFamily="34" charset="-122"/>
+                <a:cs typeface="Calibri" pitchFamily="34" charset="-120"/>
+              </a:rPr>
+              <a:t>📖 </a:t>
+            </a:r>
+            <a:r>
+              <a:rPr lang="en-AU" sz="1150" dirty="0">
+                <a:solidFill>
+                  <a:srgbClr val="90CAF9"/>
+                </a:solidFill>
+                <a:latin typeface="Calibri" pitchFamily="34" charset="0"/>
+                <a:ea typeface="Calibri" pitchFamily="34" charset="-122"/>
+                <a:cs typeface="Calibri" pitchFamily="34" charset="-120"/>
+              </a:rPr>
+              <a:t>GitHub Skills (Official - Interactive &amp; Free) : </a:t>
+            </a:r>
+            <a:r>
+              <a:rPr lang="en-AU" sz="1200" dirty="0">
+                <a:hlinkClick r:id="rId8"/>
+              </a:rPr>
+              <a:t>https://github.com/skills</a:t>
+            </a:r>
+            <a:endParaRPr lang="en-AU" sz="1200" dirty="0"/>
+          </a:p>
+          <a:p>
+            <a:r>
+              <a:rPr lang="en-US" sz="1150" dirty="0">
+                <a:solidFill>
+                  <a:srgbClr val="90CAF9"/>
+                </a:solidFill>
+                <a:latin typeface="Calibri" pitchFamily="34" charset="0"/>
+                <a:ea typeface="Calibri" pitchFamily="34" charset="-122"/>
+                <a:cs typeface="Calibri" pitchFamily="34" charset="-120"/>
+              </a:rPr>
+              <a:t>📖 </a:t>
+            </a:r>
+            <a:r>
+              <a:rPr lang="en-AU" sz="1150" dirty="0">
+                <a:solidFill>
+                  <a:srgbClr val="90CAF9"/>
+                </a:solidFill>
+                <a:latin typeface="Calibri" pitchFamily="34" charset="0"/>
+                <a:ea typeface="Calibri" pitchFamily="34" charset="-122"/>
+                <a:cs typeface="Calibri" pitchFamily="34" charset="-120"/>
+              </a:rPr>
+              <a:t>Multi skill (Interactive &amp; Free) : https://killercoda.com/</a:t>
+            </a:r>
+          </a:p>
+          <a:p>
+            <a:endParaRPr lang="en-AU" sz="1200" dirty="0"/>
+          </a:p>
+          <a:p>
+            <a:pPr>
               <a:spcAft>
                 <a:spcPts val="800"/>
               </a:spcAft>
-              <a:buNone/>
             </a:pPr>
             <a:r>
               <a:rPr lang="en-US" sz="1150" dirty="0">
@@ -13401,9 +15049,243 @@
                 <a:ea typeface="Calibri" pitchFamily="34" charset="-122"/>
                 <a:cs typeface="Calibri" pitchFamily="34" charset="-120"/>
               </a:rPr>
+              <a:t>📖 </a:t>
+            </a:r>
+            <a:r>
+              <a:rPr lang="en-AU" sz="1150" dirty="0">
+                <a:solidFill>
+                  <a:srgbClr val="90CAF9"/>
+                </a:solidFill>
+                <a:latin typeface="Calibri" pitchFamily="34" charset="0"/>
+                <a:ea typeface="Calibri" pitchFamily="34" charset="-122"/>
+                <a:cs typeface="Calibri" pitchFamily="34" charset="-120"/>
+              </a:rPr>
+              <a:t>Terraform CLI (Open Source - 100% Free Forever)</a:t>
+            </a:r>
+            <a:br>
+              <a:rPr lang="en-AU" sz="1150" dirty="0">
+                <a:solidFill>
+                  <a:srgbClr val="90CAF9"/>
+                </a:solidFill>
+                <a:latin typeface="Calibri" pitchFamily="34" charset="0"/>
+                <a:ea typeface="Calibri" pitchFamily="34" charset="-122"/>
+                <a:cs typeface="Calibri" pitchFamily="34" charset="-120"/>
+              </a:rPr>
+            </a:br>
+            <a:r>
+              <a:rPr lang="en-US" sz="1150" dirty="0">
+                <a:solidFill>
+                  <a:srgbClr val="90CAF9"/>
+                </a:solidFill>
+                <a:latin typeface="Calibri" pitchFamily="34" charset="0"/>
+                <a:ea typeface="Calibri" pitchFamily="34" charset="-122"/>
+                <a:cs typeface="Calibri" pitchFamily="34" charset="-120"/>
+              </a:rPr>
               <a:t>📖  terraform.io/docs  —  Official Terraform documentation</a:t>
             </a:r>
-            <a:endParaRPr lang="en-US" sz="1150" dirty="0"/>
+            <a:br>
+              <a:rPr lang="en-US" sz="1150" dirty="0">
+                <a:solidFill>
+                  <a:srgbClr val="90CAF9"/>
+                </a:solidFill>
+                <a:latin typeface="Calibri" pitchFamily="34" charset="0"/>
+                <a:ea typeface="Calibri" pitchFamily="34" charset="-122"/>
+                <a:cs typeface="Calibri" pitchFamily="34" charset="-120"/>
+              </a:rPr>
+            </a:br>
+            <a:br>
+              <a:rPr lang="en-US" sz="1150" dirty="0">
+                <a:solidFill>
+                  <a:srgbClr val="90CAF9"/>
+                </a:solidFill>
+                <a:latin typeface="Calibri" pitchFamily="34" charset="0"/>
+                <a:ea typeface="Calibri" pitchFamily="34" charset="-122"/>
+                <a:cs typeface="Calibri" pitchFamily="34" charset="-120"/>
+              </a:rPr>
+            </a:br>
+            <a:r>
+              <a:rPr lang="en-US" sz="1150" dirty="0">
+                <a:solidFill>
+                  <a:srgbClr val="90CAF9"/>
+                </a:solidFill>
+                <a:latin typeface="Calibri" pitchFamily="34" charset="0"/>
+                <a:ea typeface="Calibri" pitchFamily="34" charset="-122"/>
+                <a:cs typeface="Calibri" pitchFamily="34" charset="-120"/>
+              </a:rPr>
+              <a:t>🔧  developer.hashicorp.com/terraform/tutorials  —  Hands-on labs</a:t>
+            </a:r>
+            <a:br>
+              <a:rPr lang="en-US" sz="1150" dirty="0">
+                <a:solidFill>
+                  <a:srgbClr val="90CAF9"/>
+                </a:solidFill>
+                <a:latin typeface="Calibri" pitchFamily="34" charset="0"/>
+                <a:ea typeface="Calibri" pitchFamily="34" charset="-122"/>
+                <a:cs typeface="Calibri" pitchFamily="34" charset="-120"/>
+              </a:rPr>
+            </a:br>
+            <a:r>
+              <a:rPr lang="en-US" sz="1150" dirty="0">
+                <a:solidFill>
+                  <a:srgbClr val="90CAF9"/>
+                </a:solidFill>
+                <a:latin typeface="Calibri" pitchFamily="34" charset="0"/>
+                <a:ea typeface="Calibri" pitchFamily="34" charset="-122"/>
+                <a:cs typeface="Calibri" pitchFamily="34" charset="-120"/>
+              </a:rPr>
+              <a:t>🤖  docs.anthropic.com/claude-code  —  Claude Code documentation</a:t>
+            </a:r>
+            <a:br>
+              <a:rPr lang="en-US" sz="1150" dirty="0">
+                <a:solidFill>
+                  <a:srgbClr val="90CAF9"/>
+                </a:solidFill>
+                <a:latin typeface="Calibri" pitchFamily="34" charset="0"/>
+                <a:ea typeface="Calibri" pitchFamily="34" charset="-122"/>
+                <a:cs typeface="Calibri" pitchFamily="34" charset="-120"/>
+              </a:rPr>
+            </a:br>
+            <a:r>
+              <a:rPr lang="en-US" sz="1150" dirty="0">
+                <a:solidFill>
+                  <a:srgbClr val="90CAF9"/>
+                </a:solidFill>
+                <a:latin typeface="Calibri" pitchFamily="34" charset="0"/>
+                <a:ea typeface="Calibri" pitchFamily="34" charset="-122"/>
+                <a:cs typeface="Calibri" pitchFamily="34" charset="-120"/>
+              </a:rPr>
+              <a:t>⚡  build.nvidia.com  —  NVIDIA NIM model catalogue</a:t>
+            </a:r>
+            <a:br>
+              <a:rPr lang="en-US" sz="1150" dirty="0">
+                <a:solidFill>
+                  <a:srgbClr val="90CAF9"/>
+                </a:solidFill>
+                <a:latin typeface="Calibri" pitchFamily="34" charset="0"/>
+                <a:ea typeface="Calibri" pitchFamily="34" charset="-122"/>
+                <a:cs typeface="Calibri" pitchFamily="34" charset="-120"/>
+              </a:rPr>
+            </a:br>
+            <a:r>
+              <a:rPr lang="en-US" sz="1150" dirty="0">
+                <a:solidFill>
+                  <a:srgbClr val="90CAF9"/>
+                </a:solidFill>
+                <a:latin typeface="Calibri" pitchFamily="34" charset="0"/>
+                <a:ea typeface="Calibri" pitchFamily="34" charset="-122"/>
+                <a:cs typeface="Calibri" pitchFamily="34" charset="-120"/>
+              </a:rPr>
+              <a:t>🔌  modelcontextprotocol.io  —  MCP specification and servers</a:t>
+            </a:r>
+            <a:br>
+              <a:rPr lang="en-US" sz="1150" dirty="0">
+                <a:solidFill>
+                  <a:srgbClr val="90CAF9"/>
+                </a:solidFill>
+                <a:latin typeface="Calibri" pitchFamily="34" charset="0"/>
+                <a:ea typeface="Calibri" pitchFamily="34" charset="-122"/>
+                <a:cs typeface="Calibri" pitchFamily="34" charset="-120"/>
+              </a:rPr>
+            </a:br>
+            <a:r>
+              <a:rPr lang="en-US" sz="1100" dirty="0">
+                <a:solidFill>
+                  <a:srgbClr val="90CAF9"/>
+                </a:solidFill>
+                <a:latin typeface="Calibri" pitchFamily="34" charset="0"/>
+                <a:ea typeface="Calibri" pitchFamily="34" charset="-122"/>
+                <a:cs typeface="Calibri" pitchFamily="34" charset="-120"/>
+              </a:rPr>
+              <a:t>🔒  registry.terraform.io  —  Provider and module registry</a:t>
+            </a:r>
+            <a:br>
+              <a:rPr lang="en-US" sz="1100" dirty="0">
+                <a:solidFill>
+                  <a:srgbClr val="90CAF9"/>
+                </a:solidFill>
+                <a:latin typeface="Calibri" pitchFamily="34" charset="0"/>
+                <a:ea typeface="Calibri" pitchFamily="34" charset="-122"/>
+                <a:cs typeface="Calibri" pitchFamily="34" charset="-120"/>
+              </a:rPr>
+            </a:br>
+            <a:r>
+              <a:rPr lang="en-US" sz="1100" dirty="0">
+                <a:solidFill>
+                  <a:srgbClr val="90CAF9"/>
+                </a:solidFill>
+                <a:latin typeface="Calibri" pitchFamily="34" charset="0"/>
+                <a:ea typeface="Calibri" pitchFamily="34" charset="-122"/>
+                <a:cs typeface="Calibri" pitchFamily="34" charset="-120"/>
+              </a:rPr>
+              <a:t>📁  github.com/</a:t>
+            </a:r>
+            <a:r>
+              <a:rPr lang="en-US" sz="1100" dirty="0" err="1">
+                <a:solidFill>
+                  <a:srgbClr val="90CAF9"/>
+                </a:solidFill>
+                <a:latin typeface="Calibri" pitchFamily="34" charset="0"/>
+                <a:ea typeface="Calibri" pitchFamily="34" charset="-122"/>
+                <a:cs typeface="Calibri" pitchFamily="34" charset="-120"/>
+              </a:rPr>
+              <a:t>github</a:t>
+            </a:r>
+            <a:r>
+              <a:rPr lang="en-US" sz="1100" dirty="0">
+                <a:solidFill>
+                  <a:srgbClr val="90CAF9"/>
+                </a:solidFill>
+                <a:latin typeface="Calibri" pitchFamily="34" charset="0"/>
+                <a:ea typeface="Calibri" pitchFamily="34" charset="-122"/>
+                <a:cs typeface="Calibri" pitchFamily="34" charset="-120"/>
+              </a:rPr>
+              <a:t>/</a:t>
+            </a:r>
+            <a:r>
+              <a:rPr lang="en-US" sz="1100" dirty="0" err="1">
+                <a:solidFill>
+                  <a:srgbClr val="90CAF9"/>
+                </a:solidFill>
+                <a:latin typeface="Calibri" pitchFamily="34" charset="0"/>
+                <a:ea typeface="Calibri" pitchFamily="34" charset="-122"/>
+                <a:cs typeface="Calibri" pitchFamily="34" charset="-120"/>
+              </a:rPr>
+              <a:t>gitignore</a:t>
+            </a:r>
+            <a:r>
+              <a:rPr lang="en-US" sz="1100" dirty="0">
+                <a:solidFill>
+                  <a:srgbClr val="90CAF9"/>
+                </a:solidFill>
+                <a:latin typeface="Calibri" pitchFamily="34" charset="0"/>
+                <a:ea typeface="Calibri" pitchFamily="34" charset="-122"/>
+                <a:cs typeface="Calibri" pitchFamily="34" charset="-120"/>
+              </a:rPr>
+              <a:t>  —  Terraform .</a:t>
+            </a:r>
+            <a:r>
+              <a:rPr lang="en-US" sz="1100" dirty="0" err="1">
+                <a:solidFill>
+                  <a:srgbClr val="90CAF9"/>
+                </a:solidFill>
+                <a:latin typeface="Calibri" pitchFamily="34" charset="0"/>
+                <a:ea typeface="Calibri" pitchFamily="34" charset="-122"/>
+                <a:cs typeface="Calibri" pitchFamily="34" charset="-120"/>
+              </a:rPr>
+              <a:t>gitignore</a:t>
+            </a:r>
+            <a:r>
+              <a:rPr lang="en-US" sz="1100" dirty="0">
+                <a:solidFill>
+                  <a:srgbClr val="90CAF9"/>
+                </a:solidFill>
+                <a:latin typeface="Calibri" pitchFamily="34" charset="0"/>
+                <a:ea typeface="Calibri" pitchFamily="34" charset="-122"/>
+                <a:cs typeface="Calibri" pitchFamily="34" charset="-120"/>
+              </a:rPr>
+              <a:t> template</a:t>
+            </a:r>
+            <a:endParaRPr lang="en-US" sz="1100" dirty="0"/>
           </a:p>
           <a:p>
             <a:pPr marL="0" indent="0">
@@ -13412,18 +15294,14 @@
               </a:spcAft>
               <a:buNone/>
             </a:pPr>
-            <a:r>
-              <a:rPr lang="en-US" sz="1150" dirty="0">
-                <a:solidFill>
-                  <a:srgbClr val="90CAF9"/>
-                </a:solidFill>
-                <a:latin typeface="Calibri" pitchFamily="34" charset="0"/>
-                <a:ea typeface="Calibri" pitchFamily="34" charset="-122"/>
-                <a:cs typeface="Calibri" pitchFamily="34" charset="-120"/>
-              </a:rPr>
-              <a:t>🔧  developer.hashicorp.com/terraform/tutorials  —  Hands-on labs</a:t>
-            </a:r>
-            <a:endParaRPr lang="en-US" sz="1150" dirty="0"/>
+            <a:endParaRPr lang="en-US" sz="1150" dirty="0">
+              <a:solidFill>
+                <a:srgbClr val="90CAF9"/>
+              </a:solidFill>
+              <a:latin typeface="Calibri" pitchFamily="34" charset="0"/>
+              <a:ea typeface="Calibri" pitchFamily="34" charset="-122"/>
+              <a:cs typeface="Calibri" pitchFamily="34" charset="-120"/>
+            </a:endParaRPr>
           </a:p>
           <a:p>
             <a:pPr marL="0" indent="0">
@@ -13432,64 +15310,19 @@
               </a:spcAft>
               <a:buNone/>
             </a:pPr>
-            <a:r>
-              <a:rPr lang="en-US" sz="1150" dirty="0">
-                <a:solidFill>
-                  <a:srgbClr val="90CAF9"/>
-                </a:solidFill>
-                <a:latin typeface="Calibri" pitchFamily="34" charset="0"/>
-                <a:ea typeface="Calibri" pitchFamily="34" charset="-122"/>
-                <a:cs typeface="Calibri" pitchFamily="34" charset="-120"/>
-              </a:rPr>
-              <a:t>🤖  docs.anthropic.com/claude-code  —  Claude Code documentation</a:t>
-            </a:r>
             <a:endParaRPr lang="en-US" sz="1150" dirty="0"/>
           </a:p>
-          <a:p>
-            <a:pPr marL="0" indent="0">
-              <a:spcAft>
-                <a:spcPts val="800"/>
-              </a:spcAft>
-              <a:buNone/>
-            </a:pPr>
-            <a:r>
-              <a:rPr lang="en-US" sz="1150" dirty="0">
-                <a:solidFill>
-                  <a:srgbClr val="90CAF9"/>
-                </a:solidFill>
-                <a:latin typeface="Calibri" pitchFamily="34" charset="0"/>
-                <a:ea typeface="Calibri" pitchFamily="34" charset="-122"/>
-                <a:cs typeface="Calibri" pitchFamily="34" charset="-120"/>
-              </a:rPr>
-              <a:t>⚡  build.nvidia.com  —  NVIDIA NIM model catalogue</a:t>
-            </a:r>
-            <a:endParaRPr lang="en-US" sz="1150" dirty="0"/>
-          </a:p>
-          <a:p>
-            <a:pPr marL="0" indent="0">
-              <a:spcAft>
-                <a:spcPts val="800"/>
-              </a:spcAft>
-              <a:buNone/>
-            </a:pPr>
-            <a:r>
-              <a:rPr lang="en-US" sz="1150" dirty="0">
-                <a:solidFill>
-                  <a:srgbClr val="90CAF9"/>
-                </a:solidFill>
-                <a:latin typeface="Calibri" pitchFamily="34" charset="0"/>
-                <a:ea typeface="Calibri" pitchFamily="34" charset="-122"/>
-                <a:cs typeface="Calibri" pitchFamily="34" charset="-120"/>
-              </a:rPr>
-              <a:t>🔌  modelcontextprotocol.io  —  MCP specification and servers</a:t>
-            </a:r>
-            <a:endParaRPr lang="en-US" sz="1150" dirty="0"/>
-          </a:p>
-        </p:txBody>
-      </p:sp>
-      <p:sp>
-        <p:nvSpPr>
-          <p:cNvPr id="7" name="Text 5"/>
+        </p:txBody>
+      </p:sp>
+      <p:sp>
+        <p:nvSpPr>
+          <p:cNvPr id="7" name="Text 5">
+            <a:extLst>
+              <a:ext uri="{FF2B5EF4-FFF2-40B4-BE49-F238E27FC236}">
+                <a16:creationId xmlns:a16="http://schemas.microsoft.com/office/drawing/2014/main" id="{FF05F196-66F4-7D37-1287-97AF053729AF}"/>
+              </a:ext>
+            </a:extLst>
+          </p:cNvPr>
           <p:cNvSpPr/>
           <p:nvPr/>
         </p:nvSpPr>
@@ -13527,6 +15360,11 @@
         </p:txBody>
       </p:sp>
     </p:spTree>
+    <p:extLst>
+      <p:ext uri="{BB962C8B-B14F-4D97-AF65-F5344CB8AC3E}">
+        <p14:creationId xmlns:p14="http://schemas.microsoft.com/office/powerpoint/2010/main" val="3715516981"/>
+      </p:ext>
+    </p:extLst>
   </p:cSld>
   <p:clrMapOvr>
     <a:masterClrMapping/>
@@ -15511,6 +17349,882 @@
         </p:txBody>
       </p:sp>
     </p:spTree>
+  </p:cSld>
+  <p:clrMapOvr>
+    <a:masterClrMapping/>
+  </p:clrMapOvr>
+</p:sld>
+</file>
+
+<file path=ppt/slides/slide20.xml><?xml version="1.0" encoding="utf-8"?>
+<p:sld xmlns:a="http://schemas.openxmlformats.org/drawingml/2006/main" xmlns:r="http://schemas.openxmlformats.org/officeDocument/2006/relationships" xmlns:p="http://schemas.openxmlformats.org/presentationml/2006/main">
+  <p:cSld>
+    <p:bg>
+      <p:bgPr>
+        <a:solidFill>
+          <a:srgbClr val="0D1B2A"/>
+        </a:solidFill>
+        <a:effectLst/>
+      </p:bgPr>
+    </p:bg>
+    <p:spTree>
+      <p:nvGrpSpPr>
+        <p:cNvPr id="1" name="">
+          <a:extLst>
+            <a:ext uri="{FF2B5EF4-FFF2-40B4-BE49-F238E27FC236}">
+              <a16:creationId xmlns:a16="http://schemas.microsoft.com/office/drawing/2014/main" id="{C9697177-1E58-660D-06D3-7DE63A187A0B}"/>
+            </a:ext>
+          </a:extLst>
+        </p:cNvPr>
+        <p:cNvGrpSpPr/>
+        <p:nvPr/>
+      </p:nvGrpSpPr>
+      <p:grpSpPr>
+        <a:xfrm>
+          <a:off x="0" y="0"/>
+          <a:ext cx="0" cy="0"/>
+          <a:chOff x="0" y="0"/>
+          <a:chExt cx="0" cy="0"/>
+        </a:xfrm>
+      </p:grpSpPr>
+      <p:sp>
+        <p:nvSpPr>
+          <p:cNvPr id="2" name="Shape 0">
+            <a:extLst>
+              <a:ext uri="{FF2B5EF4-FFF2-40B4-BE49-F238E27FC236}">
+                <a16:creationId xmlns:a16="http://schemas.microsoft.com/office/drawing/2014/main" id="{0075EA69-C01E-D542-E5EB-D0D847D467B5}"/>
+              </a:ext>
+            </a:extLst>
+          </p:cNvPr>
+          <p:cNvSpPr/>
+          <p:nvPr/>
+        </p:nvSpPr>
+        <p:spPr>
+          <a:xfrm>
+            <a:off x="0" y="0"/>
+            <a:ext cx="274320" cy="5143500"/>
+          </a:xfrm>
+          <a:prstGeom prst="rect">
+            <a:avLst/>
+          </a:prstGeom>
+          <a:solidFill>
+            <a:srgbClr val="00ACC1"/>
+          </a:solidFill>
+          <a:ln w="12700">
+            <a:solidFill>
+              <a:srgbClr val="00ACC1"/>
+            </a:solidFill>
+            <a:prstDash val="solid"/>
+          </a:ln>
+        </p:spPr>
+        <p:txBody>
+          <a:bodyPr/>
+          <a:lstStyle/>
+          <a:p>
+            <a:endParaRPr lang="en-AU"/>
+          </a:p>
+        </p:txBody>
+      </p:sp>
+      <p:sp>
+        <p:nvSpPr>
+          <p:cNvPr id="3" name="Text 1">
+            <a:extLst>
+              <a:ext uri="{FF2B5EF4-FFF2-40B4-BE49-F238E27FC236}">
+                <a16:creationId xmlns:a16="http://schemas.microsoft.com/office/drawing/2014/main" id="{C6CC1475-FB2C-3ECB-A92B-F6303B121C20}"/>
+              </a:ext>
+            </a:extLst>
+          </p:cNvPr>
+          <p:cNvSpPr/>
+          <p:nvPr/>
+        </p:nvSpPr>
+        <p:spPr>
+          <a:xfrm>
+            <a:off x="640080" y="73855"/>
+            <a:ext cx="7835705" cy="845820"/>
+          </a:xfrm>
+          <a:prstGeom prst="rect">
+            <a:avLst/>
+          </a:prstGeom>
+          <a:noFill/>
+          <a:ln/>
+        </p:spPr>
+        <p:txBody>
+          <a:bodyPr wrap="square" rtlCol="0" anchor="ctr"/>
+          <a:lstStyle/>
+          <a:p>
+            <a:pPr marL="0" indent="0">
+              <a:buNone/>
+            </a:pPr>
+            <a:r>
+              <a:rPr lang="en-US" sz="5600" b="1" dirty="0">
+                <a:solidFill>
+                  <a:srgbClr val="FFFFFF"/>
+                </a:solidFill>
+                <a:latin typeface="Calibri" pitchFamily="34" charset="0"/>
+                <a:ea typeface="Calibri" pitchFamily="34" charset="-122"/>
+                <a:cs typeface="Calibri" pitchFamily="34" charset="-120"/>
+              </a:rPr>
+              <a:t>Tips and Tricks</a:t>
+            </a:r>
+            <a:endParaRPr lang="en-US" sz="5600" dirty="0"/>
+          </a:p>
+        </p:txBody>
+      </p:sp>
+      <p:sp>
+        <p:nvSpPr>
+          <p:cNvPr id="4" name="Text 2">
+            <a:extLst>
+              <a:ext uri="{FF2B5EF4-FFF2-40B4-BE49-F238E27FC236}">
+                <a16:creationId xmlns:a16="http://schemas.microsoft.com/office/drawing/2014/main" id="{C7D33C2F-F4CC-2CD6-D268-B6A449C7A0E8}"/>
+              </a:ext>
+            </a:extLst>
+          </p:cNvPr>
+          <p:cNvSpPr/>
+          <p:nvPr/>
+        </p:nvSpPr>
+        <p:spPr>
+          <a:xfrm>
+            <a:off x="548640" y="1368555"/>
+            <a:ext cx="8046720" cy="411480"/>
+          </a:xfrm>
+          <a:prstGeom prst="rect">
+            <a:avLst/>
+          </a:prstGeom>
+          <a:noFill/>
+          <a:ln/>
+        </p:spPr>
+        <p:txBody>
+          <a:bodyPr wrap="square" rtlCol="0" anchor="ctr"/>
+          <a:lstStyle/>
+          <a:p>
+            <a:pPr marL="0" indent="0">
+              <a:buNone/>
+            </a:pPr>
+            <a:r>
+              <a:rPr lang="en-US" sz="1300" kern="0" spc="500" dirty="0" err="1">
+                <a:solidFill>
+                  <a:srgbClr val="00ACC1"/>
+                </a:solidFill>
+                <a:latin typeface="Calibri" pitchFamily="34" charset="0"/>
+                <a:ea typeface="Calibri" pitchFamily="34" charset="-122"/>
+                <a:cs typeface="Calibri" pitchFamily="34" charset="-120"/>
+              </a:rPr>
+              <a:t>VSCode</a:t>
+            </a:r>
+            <a:r>
+              <a:rPr lang="en-US" sz="1300" kern="0" spc="500" dirty="0">
+                <a:solidFill>
+                  <a:srgbClr val="00ACC1"/>
+                </a:solidFill>
+                <a:latin typeface="Calibri" pitchFamily="34" charset="0"/>
+                <a:ea typeface="Calibri" pitchFamily="34" charset="-122"/>
+                <a:cs typeface="Calibri" pitchFamily="34" charset="-120"/>
+              </a:rPr>
+              <a:t> Extensions</a:t>
+            </a:r>
+            <a:endParaRPr lang="en-US" sz="1300" dirty="0"/>
+          </a:p>
+        </p:txBody>
+      </p:sp>
+      <p:sp>
+        <p:nvSpPr>
+          <p:cNvPr id="5" name="Shape 3">
+            <a:extLst>
+              <a:ext uri="{FF2B5EF4-FFF2-40B4-BE49-F238E27FC236}">
+                <a16:creationId xmlns:a16="http://schemas.microsoft.com/office/drawing/2014/main" id="{0095C597-F1D8-A6FF-215D-1347CD20F94E}"/>
+              </a:ext>
+            </a:extLst>
+          </p:cNvPr>
+          <p:cNvSpPr/>
+          <p:nvPr/>
+        </p:nvSpPr>
+        <p:spPr>
+          <a:xfrm>
+            <a:off x="640080" y="1044529"/>
+            <a:ext cx="8229600" cy="36576"/>
+          </a:xfrm>
+          <a:prstGeom prst="rect">
+            <a:avLst/>
+          </a:prstGeom>
+          <a:solidFill>
+            <a:srgbClr val="263238"/>
+          </a:solidFill>
+          <a:ln w="12700">
+            <a:solidFill>
+              <a:srgbClr val="263238"/>
+            </a:solidFill>
+            <a:prstDash val="solid"/>
+          </a:ln>
+        </p:spPr>
+        <p:txBody>
+          <a:bodyPr/>
+          <a:lstStyle/>
+          <a:p>
+            <a:endParaRPr lang="en-AU"/>
+          </a:p>
+        </p:txBody>
+      </p:sp>
+      <p:sp>
+        <p:nvSpPr>
+          <p:cNvPr id="6" name="Text 4">
+            <a:extLst>
+              <a:ext uri="{FF2B5EF4-FFF2-40B4-BE49-F238E27FC236}">
+                <a16:creationId xmlns:a16="http://schemas.microsoft.com/office/drawing/2014/main" id="{1418FF77-03B9-CD0D-6DD9-C2481BC1323F}"/>
+              </a:ext>
+            </a:extLst>
+          </p:cNvPr>
+          <p:cNvSpPr/>
+          <p:nvPr/>
+        </p:nvSpPr>
+        <p:spPr>
+          <a:xfrm>
+            <a:off x="640080" y="1408594"/>
+            <a:ext cx="8046720" cy="3040376"/>
+          </a:xfrm>
+          <a:prstGeom prst="rect">
+            <a:avLst/>
+          </a:prstGeom>
+          <a:noFill/>
+          <a:ln/>
+        </p:spPr>
+        <p:txBody>
+          <a:bodyPr wrap="square" rtlCol="0" anchor="ctr"/>
+          <a:lstStyle/>
+          <a:p>
+            <a:r>
+              <a:rPr lang="en-US" sz="1150" dirty="0">
+                <a:solidFill>
+                  <a:srgbClr val="90CAF9"/>
+                </a:solidFill>
+                <a:latin typeface="Calibri" pitchFamily="34" charset="0"/>
+                <a:ea typeface="Calibri" pitchFamily="34" charset="-122"/>
+                <a:cs typeface="Calibri" pitchFamily="34" charset="-120"/>
+              </a:rPr>
+              <a:t>🔧  </a:t>
+            </a:r>
+            <a:r>
+              <a:rPr lang="en-US" sz="1150" b="1" dirty="0">
+                <a:solidFill>
+                  <a:srgbClr val="FF0000"/>
+                </a:solidFill>
+                <a:latin typeface="Calibri" pitchFamily="34" charset="0"/>
+                <a:ea typeface="Calibri" pitchFamily="34" charset="-122"/>
+                <a:cs typeface="Calibri" pitchFamily="34" charset="-120"/>
+              </a:rPr>
+              <a:t>Live Share</a:t>
+            </a:r>
+            <a:r>
+              <a:rPr lang="en-US" sz="1150" dirty="0">
+                <a:solidFill>
+                  <a:srgbClr val="FF0000"/>
+                </a:solidFill>
+                <a:latin typeface="Calibri" pitchFamily="34" charset="0"/>
+                <a:ea typeface="Calibri" pitchFamily="34" charset="-122"/>
+                <a:cs typeface="Calibri" pitchFamily="34" charset="-120"/>
+              </a:rPr>
+              <a:t> </a:t>
+            </a:r>
+            <a:r>
+              <a:rPr lang="en-US" sz="1150" dirty="0">
+                <a:solidFill>
+                  <a:srgbClr val="90CAF9"/>
+                </a:solidFill>
+                <a:latin typeface="Calibri" pitchFamily="34" charset="0"/>
+                <a:ea typeface="Calibri" pitchFamily="34" charset="-122"/>
+                <a:cs typeface="Calibri" pitchFamily="34" charset="-120"/>
+              </a:rPr>
+              <a:t>– to share your screen with another developer</a:t>
+            </a:r>
+            <a:br>
+              <a:rPr lang="en-US" sz="1150" dirty="0">
+                <a:solidFill>
+                  <a:srgbClr val="90CAF9"/>
+                </a:solidFill>
+                <a:latin typeface="Calibri" pitchFamily="34" charset="0"/>
+                <a:ea typeface="Calibri" pitchFamily="34" charset="-122"/>
+                <a:cs typeface="Calibri" pitchFamily="34" charset="-120"/>
+              </a:rPr>
+            </a:br>
+            <a:br>
+              <a:rPr lang="en-US" sz="1150" dirty="0">
+                <a:solidFill>
+                  <a:srgbClr val="90CAF9"/>
+                </a:solidFill>
+                <a:latin typeface="Calibri" pitchFamily="34" charset="0"/>
+                <a:ea typeface="Calibri" pitchFamily="34" charset="-122"/>
+                <a:cs typeface="Calibri" pitchFamily="34" charset="-120"/>
+              </a:rPr>
+            </a:br>
+            <a:r>
+              <a:rPr lang="en-US" sz="1150" dirty="0">
+                <a:solidFill>
+                  <a:srgbClr val="90CAF9"/>
+                </a:solidFill>
+                <a:latin typeface="Calibri" pitchFamily="34" charset="0"/>
+                <a:ea typeface="Calibri" pitchFamily="34" charset="-122"/>
+                <a:cs typeface="Calibri" pitchFamily="34" charset="-120"/>
+              </a:rPr>
+              <a:t>🔧  </a:t>
+            </a:r>
+            <a:r>
+              <a:rPr lang="en-US" sz="1150" b="1" dirty="0">
+                <a:solidFill>
+                  <a:srgbClr val="FF0000"/>
+                </a:solidFill>
+                <a:latin typeface="Calibri" pitchFamily="34" charset="0"/>
+                <a:ea typeface="Calibri" pitchFamily="34" charset="-122"/>
+                <a:cs typeface="Calibri" pitchFamily="34" charset="-120"/>
+              </a:rPr>
+              <a:t>Live Server</a:t>
+            </a:r>
+            <a:r>
+              <a:rPr lang="en-US" sz="1150" dirty="0">
+                <a:solidFill>
+                  <a:srgbClr val="FF0000"/>
+                </a:solidFill>
+                <a:latin typeface="Calibri" pitchFamily="34" charset="0"/>
+                <a:ea typeface="Calibri" pitchFamily="34" charset="-122"/>
+                <a:cs typeface="Calibri" pitchFamily="34" charset="-120"/>
+              </a:rPr>
+              <a:t> </a:t>
+            </a:r>
+            <a:r>
+              <a:rPr lang="en-US" sz="1150" dirty="0">
+                <a:solidFill>
+                  <a:srgbClr val="90CAF9"/>
+                </a:solidFill>
+                <a:latin typeface="Calibri" pitchFamily="34" charset="0"/>
+                <a:ea typeface="Calibri" pitchFamily="34" charset="-122"/>
+                <a:cs typeface="Calibri" pitchFamily="34" charset="-120"/>
+              </a:rPr>
+              <a:t>– to Open a webpage live</a:t>
+            </a:r>
+            <a:br>
+              <a:rPr lang="en-US" sz="1150" dirty="0">
+                <a:solidFill>
+                  <a:srgbClr val="90CAF9"/>
+                </a:solidFill>
+                <a:latin typeface="Calibri" pitchFamily="34" charset="0"/>
+                <a:ea typeface="Calibri" pitchFamily="34" charset="-122"/>
+                <a:cs typeface="Calibri" pitchFamily="34" charset="-120"/>
+              </a:rPr>
+            </a:br>
+            <a:br>
+              <a:rPr lang="en-US" sz="1150" dirty="0">
+                <a:solidFill>
+                  <a:srgbClr val="90CAF9"/>
+                </a:solidFill>
+                <a:latin typeface="Calibri" pitchFamily="34" charset="0"/>
+                <a:ea typeface="Calibri" pitchFamily="34" charset="-122"/>
+                <a:cs typeface="Calibri" pitchFamily="34" charset="-120"/>
+              </a:rPr>
+            </a:br>
+            <a:r>
+              <a:rPr lang="en-US" sz="1150" dirty="0">
+                <a:solidFill>
+                  <a:srgbClr val="90CAF9"/>
+                </a:solidFill>
+                <a:latin typeface="Calibri" pitchFamily="34" charset="0"/>
+                <a:ea typeface="Calibri" pitchFamily="34" charset="-122"/>
+                <a:cs typeface="Calibri" pitchFamily="34" charset="-120"/>
+              </a:rPr>
+              <a:t>🔧 </a:t>
+            </a:r>
+            <a:r>
+              <a:rPr lang="en-AU" sz="1150" b="1" dirty="0">
+                <a:solidFill>
+                  <a:srgbClr val="FF0000"/>
+                </a:solidFill>
+                <a:latin typeface="Calibri" pitchFamily="34" charset="0"/>
+                <a:ea typeface="Calibri" pitchFamily="34" charset="-122"/>
+                <a:cs typeface="Calibri" pitchFamily="34" charset="-120"/>
+              </a:rPr>
+              <a:t>Markdown Preview </a:t>
+            </a:r>
+            <a:r>
+              <a:rPr lang="en-AU" sz="1150" b="1" dirty="0" err="1">
+                <a:solidFill>
+                  <a:srgbClr val="FF0000"/>
+                </a:solidFill>
+                <a:latin typeface="Calibri" pitchFamily="34" charset="0"/>
+                <a:ea typeface="Calibri" pitchFamily="34" charset="-122"/>
+                <a:cs typeface="Calibri" pitchFamily="34" charset="-120"/>
+              </a:rPr>
+              <a:t>Github</a:t>
+            </a:r>
+            <a:r>
+              <a:rPr lang="en-AU" sz="1150" b="1" dirty="0">
+                <a:solidFill>
+                  <a:srgbClr val="FF0000"/>
+                </a:solidFill>
+                <a:latin typeface="Calibri" pitchFamily="34" charset="0"/>
+                <a:ea typeface="Calibri" pitchFamily="34" charset="-122"/>
+                <a:cs typeface="Calibri" pitchFamily="34" charset="-120"/>
+              </a:rPr>
+              <a:t> Styling</a:t>
+            </a:r>
+            <a:r>
+              <a:rPr lang="en-AU" sz="1150" dirty="0">
+                <a:solidFill>
+                  <a:srgbClr val="FF0000"/>
+                </a:solidFill>
+                <a:latin typeface="Calibri" pitchFamily="34" charset="0"/>
+                <a:ea typeface="Calibri" pitchFamily="34" charset="-122"/>
+                <a:cs typeface="Calibri" pitchFamily="34" charset="-120"/>
+              </a:rPr>
+              <a:t>- </a:t>
+            </a:r>
+            <a:r>
+              <a:rPr lang="en-AU" sz="1150" dirty="0">
+                <a:solidFill>
+                  <a:srgbClr val="90CAF9"/>
+                </a:solidFill>
+                <a:latin typeface="Calibri" pitchFamily="34" charset="0"/>
+                <a:ea typeface="Calibri" pitchFamily="34" charset="-122"/>
+                <a:cs typeface="Calibri" pitchFamily="34" charset="-120"/>
+              </a:rPr>
+              <a:t>To preview your md file.</a:t>
+            </a:r>
+            <a:br>
+              <a:rPr lang="en-AU" sz="1150" dirty="0">
+                <a:solidFill>
+                  <a:srgbClr val="90CAF9"/>
+                </a:solidFill>
+                <a:latin typeface="Calibri" pitchFamily="34" charset="0"/>
+                <a:ea typeface="Calibri" pitchFamily="34" charset="-122"/>
+                <a:cs typeface="Calibri" pitchFamily="34" charset="-120"/>
+              </a:rPr>
+            </a:br>
+            <a:br>
+              <a:rPr lang="en-AU" sz="1150" dirty="0">
+                <a:solidFill>
+                  <a:srgbClr val="90CAF9"/>
+                </a:solidFill>
+                <a:latin typeface="Calibri" pitchFamily="34" charset="0"/>
+                <a:ea typeface="Calibri" pitchFamily="34" charset="-122"/>
+                <a:cs typeface="Calibri" pitchFamily="34" charset="-120"/>
+              </a:rPr>
+            </a:br>
+            <a:r>
+              <a:rPr lang="en-US" sz="1150" dirty="0">
+                <a:solidFill>
+                  <a:srgbClr val="90CAF9"/>
+                </a:solidFill>
+                <a:latin typeface="Calibri" pitchFamily="34" charset="0"/>
+                <a:ea typeface="Calibri" pitchFamily="34" charset="-122"/>
+                <a:cs typeface="Calibri" pitchFamily="34" charset="-120"/>
+              </a:rPr>
+              <a:t>🔧 </a:t>
+            </a:r>
+            <a:r>
+              <a:rPr lang="en-AU" sz="1150" b="1" dirty="0">
+                <a:solidFill>
+                  <a:srgbClr val="FF0000"/>
+                </a:solidFill>
+                <a:latin typeface="Calibri" pitchFamily="34" charset="0"/>
+                <a:ea typeface="Calibri" pitchFamily="34" charset="-122"/>
+                <a:cs typeface="Calibri" pitchFamily="34" charset="-120"/>
+              </a:rPr>
+              <a:t>Remote – SSH</a:t>
+            </a:r>
+            <a:r>
+              <a:rPr lang="en-AU" sz="1150" dirty="0">
+                <a:solidFill>
+                  <a:srgbClr val="FF0000"/>
+                </a:solidFill>
+                <a:latin typeface="Calibri" pitchFamily="34" charset="0"/>
+                <a:ea typeface="Calibri" pitchFamily="34" charset="-122"/>
+                <a:cs typeface="Calibri" pitchFamily="34" charset="-120"/>
+              </a:rPr>
+              <a:t>- </a:t>
+            </a:r>
+            <a:r>
+              <a:rPr lang="en-AU" sz="1150" dirty="0">
+                <a:solidFill>
+                  <a:srgbClr val="90CAF9"/>
+                </a:solidFill>
+                <a:latin typeface="Calibri" pitchFamily="34" charset="0"/>
+                <a:ea typeface="Calibri" pitchFamily="34" charset="-122"/>
+                <a:cs typeface="Calibri" pitchFamily="34" charset="-120"/>
+              </a:rPr>
+              <a:t>To connect Linux server in VSCODE for GUI feel.</a:t>
+            </a:r>
+            <a:br>
+              <a:rPr lang="en-AU" sz="1150" dirty="0">
+                <a:solidFill>
+                  <a:srgbClr val="90CAF9"/>
+                </a:solidFill>
+                <a:latin typeface="Calibri" pitchFamily="34" charset="0"/>
+                <a:ea typeface="Calibri" pitchFamily="34" charset="-122"/>
+                <a:cs typeface="Calibri" pitchFamily="34" charset="-120"/>
+              </a:rPr>
+            </a:br>
+            <a:br>
+              <a:rPr lang="en-AU" sz="1150" dirty="0">
+                <a:solidFill>
+                  <a:srgbClr val="90CAF9"/>
+                </a:solidFill>
+                <a:latin typeface="Calibri" pitchFamily="34" charset="0"/>
+                <a:ea typeface="Calibri" pitchFamily="34" charset="-122"/>
+                <a:cs typeface="Calibri" pitchFamily="34" charset="-120"/>
+              </a:rPr>
+            </a:br>
+            <a:r>
+              <a:rPr lang="en-US" sz="1150" dirty="0">
+                <a:solidFill>
+                  <a:srgbClr val="90CAF9"/>
+                </a:solidFill>
+                <a:latin typeface="Calibri" pitchFamily="34" charset="0"/>
+                <a:ea typeface="Calibri" pitchFamily="34" charset="-122"/>
+                <a:cs typeface="Calibri" pitchFamily="34" charset="-120"/>
+              </a:rPr>
+              <a:t>🔧 </a:t>
+            </a:r>
+            <a:r>
+              <a:rPr lang="en-AU" sz="1150" b="1" dirty="0">
+                <a:solidFill>
+                  <a:srgbClr val="FF0000"/>
+                </a:solidFill>
+                <a:latin typeface="Calibri" pitchFamily="34" charset="0"/>
+                <a:ea typeface="Calibri" pitchFamily="34" charset="-122"/>
+                <a:cs typeface="Calibri" pitchFamily="34" charset="-120"/>
+              </a:rPr>
+              <a:t>YAML</a:t>
+            </a:r>
+            <a:r>
+              <a:rPr lang="en-AU" sz="1150" dirty="0">
+                <a:solidFill>
+                  <a:srgbClr val="90CAF9"/>
+                </a:solidFill>
+                <a:latin typeface="Calibri" pitchFamily="34" charset="0"/>
+                <a:ea typeface="Calibri" pitchFamily="34" charset="-122"/>
+                <a:cs typeface="Calibri" pitchFamily="34" charset="-120"/>
+              </a:rPr>
+              <a:t>- To show help for YAML format</a:t>
+            </a:r>
+            <a:endParaRPr lang="en-US" sz="1150" dirty="0">
+              <a:solidFill>
+                <a:srgbClr val="90CAF9"/>
+              </a:solidFill>
+              <a:latin typeface="Calibri" pitchFamily="34" charset="0"/>
+              <a:ea typeface="Calibri" pitchFamily="34" charset="-122"/>
+              <a:cs typeface="Calibri" pitchFamily="34" charset="-120"/>
+            </a:endParaRPr>
+          </a:p>
+          <a:p>
+            <a:pPr marL="0" indent="0">
+              <a:spcAft>
+                <a:spcPts val="800"/>
+              </a:spcAft>
+              <a:buNone/>
+            </a:pPr>
+            <a:endParaRPr lang="en-US" sz="1150" dirty="0"/>
+          </a:p>
+        </p:txBody>
+      </p:sp>
+      <p:sp>
+        <p:nvSpPr>
+          <p:cNvPr id="7" name="Text 5">
+            <a:extLst>
+              <a:ext uri="{FF2B5EF4-FFF2-40B4-BE49-F238E27FC236}">
+                <a16:creationId xmlns:a16="http://schemas.microsoft.com/office/drawing/2014/main" id="{FD92EEB2-8DF5-7458-8045-748234B92D40}"/>
+              </a:ext>
+            </a:extLst>
+          </p:cNvPr>
+          <p:cNvSpPr/>
+          <p:nvPr/>
+        </p:nvSpPr>
+        <p:spPr>
+          <a:xfrm>
+            <a:off x="640080" y="4736592"/>
+            <a:ext cx="7315200" cy="256032"/>
+          </a:xfrm>
+          <a:prstGeom prst="rect">
+            <a:avLst/>
+          </a:prstGeom>
+          <a:noFill/>
+          <a:ln/>
+        </p:spPr>
+        <p:txBody>
+          <a:bodyPr wrap="square" rtlCol="0" anchor="ctr"/>
+          <a:lstStyle/>
+          <a:p>
+            <a:pPr marL="0" indent="0">
+              <a:buNone/>
+            </a:pPr>
+            <a:r>
+              <a:rPr lang="en-US" sz="1000" dirty="0">
+                <a:solidFill>
+                  <a:srgbClr val="546E7A"/>
+                </a:solidFill>
+                <a:latin typeface="Calibri" pitchFamily="34" charset="0"/>
+                <a:ea typeface="Calibri" pitchFamily="34" charset="-122"/>
+                <a:cs typeface="Calibri" pitchFamily="34" charset="-120"/>
+              </a:rPr>
+              <a:t>Infrastructure Team  |  Internal Training</a:t>
+            </a:r>
+            <a:endParaRPr lang="en-US" sz="1000" dirty="0"/>
+          </a:p>
+        </p:txBody>
+      </p:sp>
+    </p:spTree>
+    <p:extLst>
+      <p:ext uri="{BB962C8B-B14F-4D97-AF65-F5344CB8AC3E}">
+        <p14:creationId xmlns:p14="http://schemas.microsoft.com/office/powerpoint/2010/main" val="2899190600"/>
+      </p:ext>
+    </p:extLst>
+  </p:cSld>
+  <p:clrMapOvr>
+    <a:masterClrMapping/>
+  </p:clrMapOvr>
+</p:sld>
+</file>
+
+<file path=ppt/slides/slide21.xml><?xml version="1.0" encoding="utf-8"?>
+<p:sld xmlns:a="http://schemas.openxmlformats.org/drawingml/2006/main" xmlns:r="http://schemas.openxmlformats.org/officeDocument/2006/relationships" xmlns:p="http://schemas.openxmlformats.org/presentationml/2006/main">
+  <p:cSld>
+    <p:bg>
+      <p:bgPr>
+        <a:solidFill>
+          <a:srgbClr val="0D1B2A"/>
+        </a:solidFill>
+        <a:effectLst/>
+      </p:bgPr>
+    </p:bg>
+    <p:spTree>
+      <p:nvGrpSpPr>
+        <p:cNvPr id="1" name="">
+          <a:extLst>
+            <a:ext uri="{FF2B5EF4-FFF2-40B4-BE49-F238E27FC236}">
+              <a16:creationId xmlns:a16="http://schemas.microsoft.com/office/drawing/2014/main" id="{FBAA765D-6BB4-6328-E147-94CAB99361F9}"/>
+            </a:ext>
+          </a:extLst>
+        </p:cNvPr>
+        <p:cNvGrpSpPr/>
+        <p:nvPr/>
+      </p:nvGrpSpPr>
+      <p:grpSpPr>
+        <a:xfrm>
+          <a:off x="0" y="0"/>
+          <a:ext cx="0" cy="0"/>
+          <a:chOff x="0" y="0"/>
+          <a:chExt cx="0" cy="0"/>
+        </a:xfrm>
+      </p:grpSpPr>
+      <p:sp>
+        <p:nvSpPr>
+          <p:cNvPr id="2" name="Shape 0">
+            <a:extLst>
+              <a:ext uri="{FF2B5EF4-FFF2-40B4-BE49-F238E27FC236}">
+                <a16:creationId xmlns:a16="http://schemas.microsoft.com/office/drawing/2014/main" id="{92A86F4C-3A8A-4833-342E-02AE57BFD583}"/>
+              </a:ext>
+            </a:extLst>
+          </p:cNvPr>
+          <p:cNvSpPr/>
+          <p:nvPr/>
+        </p:nvSpPr>
+        <p:spPr>
+          <a:xfrm>
+            <a:off x="0" y="0"/>
+            <a:ext cx="274320" cy="5143500"/>
+          </a:xfrm>
+          <a:prstGeom prst="rect">
+            <a:avLst/>
+          </a:prstGeom>
+          <a:solidFill>
+            <a:srgbClr val="00ACC1"/>
+          </a:solidFill>
+          <a:ln w="12700">
+            <a:solidFill>
+              <a:srgbClr val="00ACC1"/>
+            </a:solidFill>
+            <a:prstDash val="solid"/>
+          </a:ln>
+        </p:spPr>
+        <p:txBody>
+          <a:bodyPr/>
+          <a:lstStyle/>
+          <a:p>
+            <a:endParaRPr lang="en-AU"/>
+          </a:p>
+        </p:txBody>
+      </p:sp>
+      <p:sp>
+        <p:nvSpPr>
+          <p:cNvPr id="3" name="Text 1">
+            <a:extLst>
+              <a:ext uri="{FF2B5EF4-FFF2-40B4-BE49-F238E27FC236}">
+                <a16:creationId xmlns:a16="http://schemas.microsoft.com/office/drawing/2014/main" id="{44FD1024-C679-FDDD-0F62-885E0E597B25}"/>
+              </a:ext>
+            </a:extLst>
+          </p:cNvPr>
+          <p:cNvSpPr/>
+          <p:nvPr/>
+        </p:nvSpPr>
+        <p:spPr>
+          <a:xfrm>
+            <a:off x="2346960" y="1725930"/>
+            <a:ext cx="7835705" cy="845820"/>
+          </a:xfrm>
+          <a:prstGeom prst="rect">
+            <a:avLst/>
+          </a:prstGeom>
+          <a:noFill/>
+          <a:ln/>
+        </p:spPr>
+        <p:txBody>
+          <a:bodyPr wrap="square" rtlCol="0" anchor="ctr"/>
+          <a:lstStyle/>
+          <a:p>
+            <a:r>
+              <a:rPr lang="en-US" sz="5600" b="1" dirty="0">
+                <a:solidFill>
+                  <a:srgbClr val="FFFFFF"/>
+                </a:solidFill>
+                <a:latin typeface="Calibri" pitchFamily="34" charset="0"/>
+                <a:ea typeface="Calibri" pitchFamily="34" charset="-122"/>
+                <a:cs typeface="Calibri" pitchFamily="34" charset="-120"/>
+              </a:rPr>
+              <a:t>Questions?</a:t>
+            </a:r>
+            <a:endParaRPr lang="en-US" sz="5600" dirty="0"/>
+          </a:p>
+        </p:txBody>
+      </p:sp>
+      <p:sp>
+        <p:nvSpPr>
+          <p:cNvPr id="4" name="Text 2">
+            <a:extLst>
+              <a:ext uri="{FF2B5EF4-FFF2-40B4-BE49-F238E27FC236}">
+                <a16:creationId xmlns:a16="http://schemas.microsoft.com/office/drawing/2014/main" id="{8AF1D212-0AD9-0C89-D8EA-CBDDA74FED26}"/>
+              </a:ext>
+            </a:extLst>
+          </p:cNvPr>
+          <p:cNvSpPr/>
+          <p:nvPr/>
+        </p:nvSpPr>
+        <p:spPr>
+          <a:xfrm>
+            <a:off x="548640" y="738382"/>
+            <a:ext cx="8046720" cy="411480"/>
+          </a:xfrm>
+          <a:prstGeom prst="rect">
+            <a:avLst/>
+          </a:prstGeom>
+          <a:noFill/>
+          <a:ln/>
+        </p:spPr>
+        <p:txBody>
+          <a:bodyPr wrap="square" rtlCol="0" anchor="ctr"/>
+          <a:lstStyle/>
+          <a:p>
+            <a:pPr marL="0" indent="0">
+              <a:buNone/>
+            </a:pPr>
+            <a:r>
+              <a:rPr lang="en-US" sz="1300" kern="0" spc="500" dirty="0">
+                <a:solidFill>
+                  <a:srgbClr val="00ACC1"/>
+                </a:solidFill>
+                <a:latin typeface="Calibri" pitchFamily="34" charset="0"/>
+                <a:ea typeface="Calibri" pitchFamily="34" charset="-122"/>
+                <a:cs typeface="Calibri" pitchFamily="34" charset="-120"/>
+              </a:rPr>
+              <a:t>TERRAFORM FUNDAMENTALS + AI STACK</a:t>
+            </a:r>
+            <a:endParaRPr lang="en-US" sz="1300" dirty="0"/>
+          </a:p>
+        </p:txBody>
+      </p:sp>
+      <p:sp>
+        <p:nvSpPr>
+          <p:cNvPr id="5" name="Shape 3">
+            <a:extLst>
+              <a:ext uri="{FF2B5EF4-FFF2-40B4-BE49-F238E27FC236}">
+                <a16:creationId xmlns:a16="http://schemas.microsoft.com/office/drawing/2014/main" id="{61B2BAEC-9A1A-A65C-471F-731E1E74CCF9}"/>
+              </a:ext>
+            </a:extLst>
+          </p:cNvPr>
+          <p:cNvSpPr/>
+          <p:nvPr/>
+        </p:nvSpPr>
+        <p:spPr>
+          <a:xfrm>
+            <a:off x="640080" y="1044529"/>
+            <a:ext cx="8229600" cy="36576"/>
+          </a:xfrm>
+          <a:prstGeom prst="rect">
+            <a:avLst/>
+          </a:prstGeom>
+          <a:solidFill>
+            <a:srgbClr val="263238"/>
+          </a:solidFill>
+          <a:ln w="12700">
+            <a:solidFill>
+              <a:srgbClr val="263238"/>
+            </a:solidFill>
+            <a:prstDash val="solid"/>
+          </a:ln>
+        </p:spPr>
+        <p:txBody>
+          <a:bodyPr/>
+          <a:lstStyle/>
+          <a:p>
+            <a:endParaRPr lang="en-AU"/>
+          </a:p>
+        </p:txBody>
+      </p:sp>
+      <p:sp>
+        <p:nvSpPr>
+          <p:cNvPr id="7" name="Text 5">
+            <a:extLst>
+              <a:ext uri="{FF2B5EF4-FFF2-40B4-BE49-F238E27FC236}">
+                <a16:creationId xmlns:a16="http://schemas.microsoft.com/office/drawing/2014/main" id="{95B64770-26A0-C79C-37BE-07725003F915}"/>
+              </a:ext>
+            </a:extLst>
+          </p:cNvPr>
+          <p:cNvSpPr/>
+          <p:nvPr/>
+        </p:nvSpPr>
+        <p:spPr>
+          <a:xfrm>
+            <a:off x="640080" y="4736592"/>
+            <a:ext cx="7315200" cy="256032"/>
+          </a:xfrm>
+          <a:prstGeom prst="rect">
+            <a:avLst/>
+          </a:prstGeom>
+          <a:noFill/>
+          <a:ln/>
+        </p:spPr>
+        <p:txBody>
+          <a:bodyPr wrap="square" rtlCol="0" anchor="ctr"/>
+          <a:lstStyle/>
+          <a:p>
+            <a:pPr marL="0" indent="0">
+              <a:buNone/>
+            </a:pPr>
+            <a:r>
+              <a:rPr lang="en-US" sz="1000" dirty="0">
+                <a:solidFill>
+                  <a:srgbClr val="546E7A"/>
+                </a:solidFill>
+                <a:latin typeface="Calibri" pitchFamily="34" charset="0"/>
+                <a:ea typeface="Calibri" pitchFamily="34" charset="-122"/>
+                <a:cs typeface="Calibri" pitchFamily="34" charset="-120"/>
+              </a:rPr>
+              <a:t>Infrastructure Team  |  Internal Training</a:t>
+            </a:r>
+            <a:endParaRPr lang="en-US" sz="1000" dirty="0"/>
+          </a:p>
+        </p:txBody>
+      </p:sp>
+    </p:spTree>
+    <p:extLst>
+      <p:ext uri="{BB962C8B-B14F-4D97-AF65-F5344CB8AC3E}">
+        <p14:creationId xmlns:p14="http://schemas.microsoft.com/office/powerpoint/2010/main" val="2346578347"/>
+      </p:ext>
+    </p:extLst>
   </p:cSld>
   <p:clrMapOvr>
     <a:masterClrMapping/>

--- a/13.Free-ClaudeCode-With-MCPServer-On-Windows/Terraform_Fundamentals_v2.pptx
+++ b/13.Free-ClaudeCode-With-MCPServer-On-Windows/Terraform_Fundamentals_v2.pptx
@@ -145,10 +145,17 @@
   <pc:docChgLst>
     <pc:chgData name="Balraj Singh" userId="ebb3560a-49c8-4fe6-88be-cab19d206209" providerId="ADAL" clId="{61DE5220-E41B-45DA-B74E-167A1F9548F3}"/>
     <pc:docChg chg="undo custSel addSld delSld modSld sldOrd">
-      <pc:chgData name="Balraj Singh" userId="ebb3560a-49c8-4fe6-88be-cab19d206209" providerId="ADAL" clId="{61DE5220-E41B-45DA-B74E-167A1F9548F3}" dt="2026-05-28T02:40:58.399" v="681" actId="6549"/>
+      <pc:chgData name="Balraj Singh" userId="ebb3560a-49c8-4fe6-88be-cab19d206209" providerId="ADAL" clId="{61DE5220-E41B-45DA-B74E-167A1F9548F3}" dt="2026-05-28T06:09:21.563" v="682" actId="20577"/>
       <pc:docMkLst>
         <pc:docMk/>
       </pc:docMkLst>
+      <pc:sldChg chg="modNotesTx">
+        <pc:chgData name="Balraj Singh" userId="ebb3560a-49c8-4fe6-88be-cab19d206209" providerId="ADAL" clId="{61DE5220-E41B-45DA-B74E-167A1F9548F3}" dt="2026-05-28T06:09:21.563" v="682" actId="20577"/>
+        <pc:sldMkLst>
+          <pc:docMk/>
+          <pc:sldMk cId="0" sldId="268"/>
+        </pc:sldMkLst>
+      </pc:sldChg>
       <pc:sldChg chg="addSp delSp modSp mod">
         <pc:chgData name="Balraj Singh" userId="ebb3560a-49c8-4fe6-88be-cab19d206209" providerId="ADAL" clId="{61DE5220-E41B-45DA-B74E-167A1F9548F3}" dt="2026-05-27T23:47:35.665" v="344" actId="12385"/>
         <pc:sldMkLst>
@@ -913,6 +920,9 @@
               </a:rPr>
               <a:t>Mind-core</a:t>
             </a:r>
+            <a:br>
+              <a:rPr lang="en-AU" dirty="0"/>
+            </a:br>
             <a:endParaRPr lang="en-AU" dirty="0"/>
           </a:p>
           <a:p>
